--- a/LLM_Engineering_Presentation.pptx
+++ b/LLM_Engineering_Presentation.pptx
@@ -5,30 +5,32 @@
     <p:sldMasterId id="2147483648" r:id="rId1"/>
   </p:sldMasterIdLst>
   <p:notesMasterIdLst>
-    <p:notesMasterId r:id="rId20"/>
+    <p:notesMasterId r:id="rId22"/>
   </p:notesMasterIdLst>
   <p:handoutMasterIdLst>
-    <p:handoutMasterId r:id="rId21"/>
+    <p:handoutMasterId r:id="rId23"/>
   </p:handoutMasterIdLst>
   <p:sldIdLst>
     <p:sldId id="384" r:id="rId2"/>
     <p:sldId id="385" r:id="rId3"/>
     <p:sldId id="371" r:id="rId4"/>
     <p:sldId id="398" r:id="rId5"/>
-    <p:sldId id="415" r:id="rId6"/>
-    <p:sldId id="416" r:id="rId7"/>
-    <p:sldId id="417" r:id="rId8"/>
-    <p:sldId id="418" r:id="rId9"/>
-    <p:sldId id="419" r:id="rId10"/>
-    <p:sldId id="420" r:id="rId11"/>
-    <p:sldId id="421" r:id="rId12"/>
-    <p:sldId id="422" r:id="rId13"/>
-    <p:sldId id="423" r:id="rId14"/>
-    <p:sldId id="424" r:id="rId15"/>
-    <p:sldId id="425" r:id="rId16"/>
-    <p:sldId id="426" r:id="rId17"/>
-    <p:sldId id="414" r:id="rId18"/>
-    <p:sldId id="370" r:id="rId19"/>
+    <p:sldId id="427" r:id="rId6"/>
+    <p:sldId id="415" r:id="rId7"/>
+    <p:sldId id="416" r:id="rId8"/>
+    <p:sldId id="428" r:id="rId9"/>
+    <p:sldId id="417" r:id="rId10"/>
+    <p:sldId id="418" r:id="rId11"/>
+    <p:sldId id="419" r:id="rId12"/>
+    <p:sldId id="420" r:id="rId13"/>
+    <p:sldId id="421" r:id="rId14"/>
+    <p:sldId id="422" r:id="rId15"/>
+    <p:sldId id="423" r:id="rId16"/>
+    <p:sldId id="424" r:id="rId17"/>
+    <p:sldId id="425" r:id="rId18"/>
+    <p:sldId id="426" r:id="rId19"/>
+    <p:sldId id="414" r:id="rId20"/>
+    <p:sldId id="370" r:id="rId21"/>
   </p:sldIdLst>
   <p:sldSz cx="9144000" cy="5143500" type="screen16x9"/>
   <p:notesSz cx="6858000" cy="9144000"/>
@@ -220,7 +222,7 @@
           <a:p>
             <a:fld id="{97F00993-3FDD-4E80-810D-AC24CF6A32B3}" type="datetimeFigureOut">
               <a:rPr lang="de-DE" smtClean="0"/>
-              <a:t>17.07.2026</a:t>
+              <a:t>18.07.2026</a:t>
             </a:fld>
             <a:endParaRPr lang="de-DE"/>
           </a:p>
@@ -385,7 +387,7 @@
           <a:p>
             <a:fld id="{0F2728AD-B8FF-467B-AF5F-4891412E46D0}" type="datetimeFigureOut">
               <a:rPr lang="de-DE" smtClean="0"/>
-              <a:t>17.07.2026</a:t>
+              <a:t>18.07.2026</a:t>
             </a:fld>
             <a:endParaRPr lang="de-DE"/>
           </a:p>
@@ -768,6 +770,222 @@
         <p:cNvPr id="1" name="">
           <a:extLst>
             <a:ext uri="{FF2B5EF4-FFF2-40B4-BE49-F238E27FC236}">
+              <a16:creationId xmlns:a16="http://schemas.microsoft.com/office/drawing/2014/main" id="{3F5006F6-7337-0E08-FDEA-FEC611CD45B5}"/>
+            </a:ext>
+          </a:extLst>
+        </p:cNvPr>
+        <p:cNvGrpSpPr/>
+        <p:nvPr/>
+      </p:nvGrpSpPr>
+      <p:grpSpPr>
+        <a:xfrm>
+          <a:off x="0" y="0"/>
+          <a:ext cx="0" cy="0"/>
+          <a:chOff x="0" y="0"/>
+          <a:chExt cx="0" cy="0"/>
+        </a:xfrm>
+      </p:grpSpPr>
+      <p:sp>
+        <p:nvSpPr>
+          <p:cNvPr id="2" name="Folienbildplatzhalter 1">
+            <a:extLst>
+              <a:ext uri="{FF2B5EF4-FFF2-40B4-BE49-F238E27FC236}">
+                <a16:creationId xmlns:a16="http://schemas.microsoft.com/office/drawing/2014/main" id="{755A21C7-7DE7-8C73-B0BB-A6C8B479B1C8}"/>
+              </a:ext>
+            </a:extLst>
+          </p:cNvPr>
+          <p:cNvSpPr>
+            <a:spLocks noGrp="1" noRot="1" noChangeAspect="1"/>
+          </p:cNvSpPr>
+          <p:nvPr>
+            <p:ph type="sldImg"/>
+          </p:nvPr>
+        </p:nvSpPr>
+        <p:spPr/>
+      </p:sp>
+      <p:sp>
+        <p:nvSpPr>
+          <p:cNvPr id="3" name="Notizenplatzhalter 2">
+            <a:extLst>
+              <a:ext uri="{FF2B5EF4-FFF2-40B4-BE49-F238E27FC236}">
+                <a16:creationId xmlns:a16="http://schemas.microsoft.com/office/drawing/2014/main" id="{0686404F-33DD-44A4-2B3B-29E7D8281F14}"/>
+              </a:ext>
+            </a:extLst>
+          </p:cNvPr>
+          <p:cNvSpPr>
+            <a:spLocks noGrp="1"/>
+          </p:cNvSpPr>
+          <p:nvPr>
+            <p:ph type="body" idx="1"/>
+          </p:nvPr>
+        </p:nvSpPr>
+        <p:spPr/>
+        <p:txBody>
+          <a:bodyPr/>
+          <a:lstStyle/>
+          <a:p>
+            <a:endParaRPr lang="de-DE"/>
+          </a:p>
+        </p:txBody>
+      </p:sp>
+      <p:sp>
+        <p:nvSpPr>
+          <p:cNvPr id="4" name="Foliennummernplatzhalter 3">
+            <a:extLst>
+              <a:ext uri="{FF2B5EF4-FFF2-40B4-BE49-F238E27FC236}">
+                <a16:creationId xmlns:a16="http://schemas.microsoft.com/office/drawing/2014/main" id="{7ACA931F-F7AF-EE5A-FC0E-E2FB963E5155}"/>
+              </a:ext>
+            </a:extLst>
+          </p:cNvPr>
+          <p:cNvSpPr>
+            <a:spLocks noGrp="1"/>
+          </p:cNvSpPr>
+          <p:nvPr>
+            <p:ph type="sldNum" sz="quarter" idx="5"/>
+          </p:nvPr>
+        </p:nvSpPr>
+        <p:spPr/>
+        <p:txBody>
+          <a:bodyPr/>
+          <a:lstStyle/>
+          <a:p>
+            <a:fld id="{B9A045E6-D734-4DB2-BEE5-DF972DD20CA2}" type="slidenum">
+              <a:rPr lang="de-DE" smtClean="0"/>
+              <a:t>10</a:t>
+            </a:fld>
+            <a:endParaRPr lang="de-DE"/>
+          </a:p>
+        </p:txBody>
+      </p:sp>
+    </p:spTree>
+    <p:extLst>
+      <p:ext uri="{BB962C8B-B14F-4D97-AF65-F5344CB8AC3E}">
+        <p14:creationId xmlns:p14="http://schemas.microsoft.com/office/powerpoint/2010/main" val="3411633440"/>
+      </p:ext>
+    </p:extLst>
+  </p:cSld>
+  <p:clrMapOvr>
+    <a:masterClrMapping/>
+  </p:clrMapOvr>
+</p:notes>
+</file>
+
+<file path=ppt/notesSlides/notesSlide11.xml><?xml version="1.0" encoding="utf-8"?>
+<p:notes xmlns:a="http://schemas.openxmlformats.org/drawingml/2006/main" xmlns:r="http://schemas.openxmlformats.org/officeDocument/2006/relationships" xmlns:p="http://schemas.openxmlformats.org/presentationml/2006/main">
+  <p:cSld>
+    <p:spTree>
+      <p:nvGrpSpPr>
+        <p:cNvPr id="1" name="">
+          <a:extLst>
+            <a:ext uri="{FF2B5EF4-FFF2-40B4-BE49-F238E27FC236}">
+              <a16:creationId xmlns:a16="http://schemas.microsoft.com/office/drawing/2014/main" id="{21432590-EDD1-297C-7F91-ED1C0FED0938}"/>
+            </a:ext>
+          </a:extLst>
+        </p:cNvPr>
+        <p:cNvGrpSpPr/>
+        <p:nvPr/>
+      </p:nvGrpSpPr>
+      <p:grpSpPr>
+        <a:xfrm>
+          <a:off x="0" y="0"/>
+          <a:ext cx="0" cy="0"/>
+          <a:chOff x="0" y="0"/>
+          <a:chExt cx="0" cy="0"/>
+        </a:xfrm>
+      </p:grpSpPr>
+      <p:sp>
+        <p:nvSpPr>
+          <p:cNvPr id="2" name="Folienbildplatzhalter 1">
+            <a:extLst>
+              <a:ext uri="{FF2B5EF4-FFF2-40B4-BE49-F238E27FC236}">
+                <a16:creationId xmlns:a16="http://schemas.microsoft.com/office/drawing/2014/main" id="{77AFDF40-C453-B040-1533-6D92B0EFEBAB}"/>
+              </a:ext>
+            </a:extLst>
+          </p:cNvPr>
+          <p:cNvSpPr>
+            <a:spLocks noGrp="1" noRot="1" noChangeAspect="1"/>
+          </p:cNvSpPr>
+          <p:nvPr>
+            <p:ph type="sldImg"/>
+          </p:nvPr>
+        </p:nvSpPr>
+        <p:spPr/>
+      </p:sp>
+      <p:sp>
+        <p:nvSpPr>
+          <p:cNvPr id="3" name="Notizenplatzhalter 2">
+            <a:extLst>
+              <a:ext uri="{FF2B5EF4-FFF2-40B4-BE49-F238E27FC236}">
+                <a16:creationId xmlns:a16="http://schemas.microsoft.com/office/drawing/2014/main" id="{FE441DB5-AF0A-2492-5580-ECCD01F57A6A}"/>
+              </a:ext>
+            </a:extLst>
+          </p:cNvPr>
+          <p:cNvSpPr>
+            <a:spLocks noGrp="1"/>
+          </p:cNvSpPr>
+          <p:nvPr>
+            <p:ph type="body" idx="1"/>
+          </p:nvPr>
+        </p:nvSpPr>
+        <p:spPr/>
+        <p:txBody>
+          <a:bodyPr/>
+          <a:lstStyle/>
+          <a:p>
+            <a:endParaRPr lang="de-DE"/>
+          </a:p>
+        </p:txBody>
+      </p:sp>
+      <p:sp>
+        <p:nvSpPr>
+          <p:cNvPr id="4" name="Foliennummernplatzhalter 3">
+            <a:extLst>
+              <a:ext uri="{FF2B5EF4-FFF2-40B4-BE49-F238E27FC236}">
+                <a16:creationId xmlns:a16="http://schemas.microsoft.com/office/drawing/2014/main" id="{2FB70481-AD77-D858-C09A-05D73224EBD2}"/>
+              </a:ext>
+            </a:extLst>
+          </p:cNvPr>
+          <p:cNvSpPr>
+            <a:spLocks noGrp="1"/>
+          </p:cNvSpPr>
+          <p:nvPr>
+            <p:ph type="sldNum" sz="quarter" idx="5"/>
+          </p:nvPr>
+        </p:nvSpPr>
+        <p:spPr/>
+        <p:txBody>
+          <a:bodyPr/>
+          <a:lstStyle/>
+          <a:p>
+            <a:fld id="{B9A045E6-D734-4DB2-BEE5-DF972DD20CA2}" type="slidenum">
+              <a:rPr lang="de-DE" smtClean="0"/>
+              <a:t>11</a:t>
+            </a:fld>
+            <a:endParaRPr lang="de-DE"/>
+          </a:p>
+        </p:txBody>
+      </p:sp>
+    </p:spTree>
+    <p:extLst>
+      <p:ext uri="{BB962C8B-B14F-4D97-AF65-F5344CB8AC3E}">
+        <p14:creationId xmlns:p14="http://schemas.microsoft.com/office/powerpoint/2010/main" val="2046582652"/>
+      </p:ext>
+    </p:extLst>
+  </p:cSld>
+  <p:clrMapOvr>
+    <a:masterClrMapping/>
+  </p:clrMapOvr>
+</p:notes>
+</file>
+
+<file path=ppt/notesSlides/notesSlide12.xml><?xml version="1.0" encoding="utf-8"?>
+<p:notes xmlns:a="http://schemas.openxmlformats.org/drawingml/2006/main" xmlns:r="http://schemas.openxmlformats.org/officeDocument/2006/relationships" xmlns:p="http://schemas.openxmlformats.org/presentationml/2006/main">
+  <p:cSld>
+    <p:spTree>
+      <p:nvGrpSpPr>
+        <p:cNvPr id="1" name="">
+          <a:extLst>
+            <a:ext uri="{FF2B5EF4-FFF2-40B4-BE49-F238E27FC236}">
               <a16:creationId xmlns:a16="http://schemas.microsoft.com/office/drawing/2014/main" id="{C1ADBEA3-CF95-3579-485B-93ABE4D97ADF}"/>
             </a:ext>
           </a:extLst>
@@ -849,7 +1067,7 @@
           <a:p>
             <a:fld id="{B9A045E6-D734-4DB2-BEE5-DF972DD20CA2}" type="slidenum">
               <a:rPr lang="de-DE" smtClean="0"/>
-              <a:t>10</a:t>
+              <a:t>12</a:t>
             </a:fld>
             <a:endParaRPr lang="de-DE"/>
           </a:p>
@@ -868,7 +1086,7 @@
 </p:notes>
 </file>
 
-<file path=ppt/notesSlides/notesSlide11.xml><?xml version="1.0" encoding="utf-8"?>
+<file path=ppt/notesSlides/notesSlide13.xml><?xml version="1.0" encoding="utf-8"?>
 <p:notes xmlns:a="http://schemas.openxmlformats.org/drawingml/2006/main" xmlns:r="http://schemas.openxmlformats.org/officeDocument/2006/relationships" xmlns:p="http://schemas.openxmlformats.org/presentationml/2006/main">
   <p:cSld>
     <p:spTree>
@@ -957,7 +1175,7 @@
           <a:p>
             <a:fld id="{B9A045E6-D734-4DB2-BEE5-DF972DD20CA2}" type="slidenum">
               <a:rPr lang="de-DE" smtClean="0"/>
-              <a:t>11</a:t>
+              <a:t>13</a:t>
             </a:fld>
             <a:endParaRPr lang="de-DE"/>
           </a:p>
@@ -976,7 +1194,7 @@
 </p:notes>
 </file>
 
-<file path=ppt/notesSlides/notesSlide12.xml><?xml version="1.0" encoding="utf-8"?>
+<file path=ppt/notesSlides/notesSlide14.xml><?xml version="1.0" encoding="utf-8"?>
 <p:notes xmlns:a="http://schemas.openxmlformats.org/drawingml/2006/main" xmlns:r="http://schemas.openxmlformats.org/officeDocument/2006/relationships" xmlns:p="http://schemas.openxmlformats.org/presentationml/2006/main">
   <p:cSld>
     <p:spTree>
@@ -1065,7 +1283,7 @@
           <a:p>
             <a:fld id="{B9A045E6-D734-4DB2-BEE5-DF972DD20CA2}" type="slidenum">
               <a:rPr lang="de-DE" smtClean="0"/>
-              <a:t>12</a:t>
+              <a:t>14</a:t>
             </a:fld>
             <a:endParaRPr lang="de-DE"/>
           </a:p>
@@ -1084,7 +1302,7 @@
 </p:notes>
 </file>
 
-<file path=ppt/notesSlides/notesSlide13.xml><?xml version="1.0" encoding="utf-8"?>
+<file path=ppt/notesSlides/notesSlide15.xml><?xml version="1.0" encoding="utf-8"?>
 <p:notes xmlns:a="http://schemas.openxmlformats.org/drawingml/2006/main" xmlns:r="http://schemas.openxmlformats.org/officeDocument/2006/relationships" xmlns:p="http://schemas.openxmlformats.org/presentationml/2006/main">
   <p:cSld>
     <p:spTree>
@@ -1173,7 +1391,7 @@
           <a:p>
             <a:fld id="{B9A045E6-D734-4DB2-BEE5-DF972DD20CA2}" type="slidenum">
               <a:rPr lang="de-DE" smtClean="0"/>
-              <a:t>13</a:t>
+              <a:t>15</a:t>
             </a:fld>
             <a:endParaRPr lang="de-DE"/>
           </a:p>
@@ -1192,7 +1410,7 @@
 </p:notes>
 </file>
 
-<file path=ppt/notesSlides/notesSlide14.xml><?xml version="1.0" encoding="utf-8"?>
+<file path=ppt/notesSlides/notesSlide16.xml><?xml version="1.0" encoding="utf-8"?>
 <p:notes xmlns:a="http://schemas.openxmlformats.org/drawingml/2006/main" xmlns:r="http://schemas.openxmlformats.org/officeDocument/2006/relationships" xmlns:p="http://schemas.openxmlformats.org/presentationml/2006/main">
   <p:cSld>
     <p:spTree>
@@ -1281,7 +1499,7 @@
           <a:p>
             <a:fld id="{B9A045E6-D734-4DB2-BEE5-DF972DD20CA2}" type="slidenum">
               <a:rPr lang="de-DE" smtClean="0"/>
-              <a:t>14</a:t>
+              <a:t>16</a:t>
             </a:fld>
             <a:endParaRPr lang="de-DE"/>
           </a:p>
@@ -1300,7 +1518,7 @@
 </p:notes>
 </file>
 
-<file path=ppt/notesSlides/notesSlide15.xml><?xml version="1.0" encoding="utf-8"?>
+<file path=ppt/notesSlides/notesSlide17.xml><?xml version="1.0" encoding="utf-8"?>
 <p:notes xmlns:a="http://schemas.openxmlformats.org/drawingml/2006/main" xmlns:r="http://schemas.openxmlformats.org/officeDocument/2006/relationships" xmlns:p="http://schemas.openxmlformats.org/presentationml/2006/main">
   <p:cSld>
     <p:spTree>
@@ -1389,7 +1607,7 @@
           <a:p>
             <a:fld id="{B9A045E6-D734-4DB2-BEE5-DF972DD20CA2}" type="slidenum">
               <a:rPr lang="de-DE" smtClean="0"/>
-              <a:t>15</a:t>
+              <a:t>17</a:t>
             </a:fld>
             <a:endParaRPr lang="de-DE"/>
           </a:p>
@@ -1408,7 +1626,7 @@
 </p:notes>
 </file>
 
-<file path=ppt/notesSlides/notesSlide16.xml><?xml version="1.0" encoding="utf-8"?>
+<file path=ppt/notesSlides/notesSlide18.xml><?xml version="1.0" encoding="utf-8"?>
 <p:notes xmlns:a="http://schemas.openxmlformats.org/drawingml/2006/main" xmlns:r="http://schemas.openxmlformats.org/officeDocument/2006/relationships" xmlns:p="http://schemas.openxmlformats.org/presentationml/2006/main">
   <p:cSld>
     <p:spTree>
@@ -1497,7 +1715,7 @@
           <a:p>
             <a:fld id="{B9A045E6-D734-4DB2-BEE5-DF972DD20CA2}" type="slidenum">
               <a:rPr lang="de-DE" smtClean="0"/>
-              <a:t>16</a:t>
+              <a:t>18</a:t>
             </a:fld>
             <a:endParaRPr lang="de-DE"/>
           </a:p>
@@ -1516,7 +1734,7 @@
 </p:notes>
 </file>
 
-<file path=ppt/notesSlides/notesSlide17.xml><?xml version="1.0" encoding="utf-8"?>
+<file path=ppt/notesSlides/notesSlide19.xml><?xml version="1.0" encoding="utf-8"?>
 <p:notes xmlns:a="http://schemas.openxmlformats.org/drawingml/2006/main" xmlns:r="http://schemas.openxmlformats.org/officeDocument/2006/relationships" xmlns:p="http://schemas.openxmlformats.org/presentationml/2006/main">
   <p:cSld>
     <p:spTree>
@@ -1605,7 +1823,7 @@
           <a:p>
             <a:fld id="{B9A045E6-D734-4DB2-BEE5-DF972DD20CA2}" type="slidenum">
               <a:rPr lang="de-DE" smtClean="0"/>
-              <a:t>17</a:t>
+              <a:t>19</a:t>
             </a:fld>
             <a:endParaRPr lang="de-DE"/>
           </a:p>
@@ -1615,90 +1833,6 @@
     <p:extLst>
       <p:ext uri="{BB962C8B-B14F-4D97-AF65-F5344CB8AC3E}">
         <p14:creationId xmlns:p14="http://schemas.microsoft.com/office/powerpoint/2010/main" val="173688235"/>
-      </p:ext>
-    </p:extLst>
-  </p:cSld>
-  <p:clrMapOvr>
-    <a:masterClrMapping/>
-  </p:clrMapOvr>
-</p:notes>
-</file>
-
-<file path=ppt/notesSlides/notesSlide18.xml><?xml version="1.0" encoding="utf-8"?>
-<p:notes xmlns:a="http://schemas.openxmlformats.org/drawingml/2006/main" xmlns:r="http://schemas.openxmlformats.org/officeDocument/2006/relationships" xmlns:p="http://schemas.openxmlformats.org/presentationml/2006/main">
-  <p:cSld>
-    <p:spTree>
-      <p:nvGrpSpPr>
-        <p:cNvPr id="1" name=""/>
-        <p:cNvGrpSpPr/>
-        <p:nvPr/>
-      </p:nvGrpSpPr>
-      <p:grpSpPr>
-        <a:xfrm>
-          <a:off x="0" y="0"/>
-          <a:ext cx="0" cy="0"/>
-          <a:chOff x="0" y="0"/>
-          <a:chExt cx="0" cy="0"/>
-        </a:xfrm>
-      </p:grpSpPr>
-      <p:sp>
-        <p:nvSpPr>
-          <p:cNvPr id="2" name="Folienbildplatzhalter 1"/>
-          <p:cNvSpPr>
-            <a:spLocks noGrp="1" noRot="1" noChangeAspect="1"/>
-          </p:cNvSpPr>
-          <p:nvPr>
-            <p:ph type="sldImg"/>
-          </p:nvPr>
-        </p:nvSpPr>
-        <p:spPr/>
-      </p:sp>
-      <p:sp>
-        <p:nvSpPr>
-          <p:cNvPr id="3" name="Notizenplatzhalter 2"/>
-          <p:cNvSpPr>
-            <a:spLocks noGrp="1"/>
-          </p:cNvSpPr>
-          <p:nvPr>
-            <p:ph type="body" idx="1"/>
-          </p:nvPr>
-        </p:nvSpPr>
-        <p:spPr/>
-        <p:txBody>
-          <a:bodyPr/>
-          <a:lstStyle/>
-          <a:p>
-            <a:endParaRPr lang="de-DE"/>
-          </a:p>
-        </p:txBody>
-      </p:sp>
-      <p:sp>
-        <p:nvSpPr>
-          <p:cNvPr id="4" name="Foliennummernplatzhalter 3"/>
-          <p:cNvSpPr>
-            <a:spLocks noGrp="1"/>
-          </p:cNvSpPr>
-          <p:nvPr>
-            <p:ph type="sldNum" sz="quarter" idx="5"/>
-          </p:nvPr>
-        </p:nvSpPr>
-        <p:spPr/>
-        <p:txBody>
-          <a:bodyPr/>
-          <a:lstStyle/>
-          <a:p>
-            <a:fld id="{B9A045E6-D734-4DB2-BEE5-DF972DD20CA2}" type="slidenum">
-              <a:rPr lang="de-DE" smtClean="0"/>
-              <a:t>18</a:t>
-            </a:fld>
-            <a:endParaRPr lang="de-DE"/>
-          </a:p>
-        </p:txBody>
-      </p:sp>
-    </p:spTree>
-    <p:extLst>
-      <p:ext uri="{BB962C8B-B14F-4D97-AF65-F5344CB8AC3E}">
-        <p14:creationId xmlns:p14="http://schemas.microsoft.com/office/powerpoint/2010/main" val="931259979"/>
       </p:ext>
     </p:extLst>
   </p:cSld>
@@ -1807,6 +1941,90 @@
     <p:extLst>
       <p:ext uri="{BB962C8B-B14F-4D97-AF65-F5344CB8AC3E}">
         <p14:creationId xmlns:p14="http://schemas.microsoft.com/office/powerpoint/2010/main" val="3064021016"/>
+      </p:ext>
+    </p:extLst>
+  </p:cSld>
+  <p:clrMapOvr>
+    <a:masterClrMapping/>
+  </p:clrMapOvr>
+</p:notes>
+</file>
+
+<file path=ppt/notesSlides/notesSlide20.xml><?xml version="1.0" encoding="utf-8"?>
+<p:notes xmlns:a="http://schemas.openxmlformats.org/drawingml/2006/main" xmlns:r="http://schemas.openxmlformats.org/officeDocument/2006/relationships" xmlns:p="http://schemas.openxmlformats.org/presentationml/2006/main">
+  <p:cSld>
+    <p:spTree>
+      <p:nvGrpSpPr>
+        <p:cNvPr id="1" name=""/>
+        <p:cNvGrpSpPr/>
+        <p:nvPr/>
+      </p:nvGrpSpPr>
+      <p:grpSpPr>
+        <a:xfrm>
+          <a:off x="0" y="0"/>
+          <a:ext cx="0" cy="0"/>
+          <a:chOff x="0" y="0"/>
+          <a:chExt cx="0" cy="0"/>
+        </a:xfrm>
+      </p:grpSpPr>
+      <p:sp>
+        <p:nvSpPr>
+          <p:cNvPr id="2" name="Folienbildplatzhalter 1"/>
+          <p:cNvSpPr>
+            <a:spLocks noGrp="1" noRot="1" noChangeAspect="1"/>
+          </p:cNvSpPr>
+          <p:nvPr>
+            <p:ph type="sldImg"/>
+          </p:nvPr>
+        </p:nvSpPr>
+        <p:spPr/>
+      </p:sp>
+      <p:sp>
+        <p:nvSpPr>
+          <p:cNvPr id="3" name="Notizenplatzhalter 2"/>
+          <p:cNvSpPr>
+            <a:spLocks noGrp="1"/>
+          </p:cNvSpPr>
+          <p:nvPr>
+            <p:ph type="body" idx="1"/>
+          </p:nvPr>
+        </p:nvSpPr>
+        <p:spPr/>
+        <p:txBody>
+          <a:bodyPr/>
+          <a:lstStyle/>
+          <a:p>
+            <a:endParaRPr lang="de-DE"/>
+          </a:p>
+        </p:txBody>
+      </p:sp>
+      <p:sp>
+        <p:nvSpPr>
+          <p:cNvPr id="4" name="Foliennummernplatzhalter 3"/>
+          <p:cNvSpPr>
+            <a:spLocks noGrp="1"/>
+          </p:cNvSpPr>
+          <p:nvPr>
+            <p:ph type="sldNum" sz="quarter" idx="5"/>
+          </p:nvPr>
+        </p:nvSpPr>
+        <p:spPr/>
+        <p:txBody>
+          <a:bodyPr/>
+          <a:lstStyle/>
+          <a:p>
+            <a:fld id="{B9A045E6-D734-4DB2-BEE5-DF972DD20CA2}" type="slidenum">
+              <a:rPr lang="de-DE" smtClean="0"/>
+              <a:t>20</a:t>
+            </a:fld>
+            <a:endParaRPr lang="de-DE"/>
+          </a:p>
+        </p:txBody>
+      </p:sp>
+    </p:spTree>
+    <p:extLst>
+      <p:ext uri="{BB962C8B-B14F-4D97-AF65-F5344CB8AC3E}">
+        <p14:creationId xmlns:p14="http://schemas.microsoft.com/office/powerpoint/2010/main" val="931259979"/>
       </p:ext>
     </p:extLst>
   </p:cSld>
@@ -2016,6 +2234,114 @@
         <p:cNvPr id="1" name="">
           <a:extLst>
             <a:ext uri="{FF2B5EF4-FFF2-40B4-BE49-F238E27FC236}">
+              <a16:creationId xmlns:a16="http://schemas.microsoft.com/office/drawing/2014/main" id="{08522A14-7CB6-B07C-5098-1A94C6C6BFAA}"/>
+            </a:ext>
+          </a:extLst>
+        </p:cNvPr>
+        <p:cNvGrpSpPr/>
+        <p:nvPr/>
+      </p:nvGrpSpPr>
+      <p:grpSpPr>
+        <a:xfrm>
+          <a:off x="0" y="0"/>
+          <a:ext cx="0" cy="0"/>
+          <a:chOff x="0" y="0"/>
+          <a:chExt cx="0" cy="0"/>
+        </a:xfrm>
+      </p:grpSpPr>
+      <p:sp>
+        <p:nvSpPr>
+          <p:cNvPr id="2" name="Folienbildplatzhalter 1">
+            <a:extLst>
+              <a:ext uri="{FF2B5EF4-FFF2-40B4-BE49-F238E27FC236}">
+                <a16:creationId xmlns:a16="http://schemas.microsoft.com/office/drawing/2014/main" id="{8318465A-77EE-B849-A3BA-EF4B03B3BBE9}"/>
+              </a:ext>
+            </a:extLst>
+          </p:cNvPr>
+          <p:cNvSpPr>
+            <a:spLocks noGrp="1" noRot="1" noChangeAspect="1"/>
+          </p:cNvSpPr>
+          <p:nvPr>
+            <p:ph type="sldImg"/>
+          </p:nvPr>
+        </p:nvSpPr>
+        <p:spPr/>
+      </p:sp>
+      <p:sp>
+        <p:nvSpPr>
+          <p:cNvPr id="3" name="Notizenplatzhalter 2">
+            <a:extLst>
+              <a:ext uri="{FF2B5EF4-FFF2-40B4-BE49-F238E27FC236}">
+                <a16:creationId xmlns:a16="http://schemas.microsoft.com/office/drawing/2014/main" id="{C0E2F310-E9F8-C535-E5C4-3FCCD59464EC}"/>
+              </a:ext>
+            </a:extLst>
+          </p:cNvPr>
+          <p:cNvSpPr>
+            <a:spLocks noGrp="1"/>
+          </p:cNvSpPr>
+          <p:nvPr>
+            <p:ph type="body" idx="1"/>
+          </p:nvPr>
+        </p:nvSpPr>
+        <p:spPr/>
+        <p:txBody>
+          <a:bodyPr/>
+          <a:lstStyle/>
+          <a:p>
+            <a:endParaRPr lang="de-DE"/>
+          </a:p>
+        </p:txBody>
+      </p:sp>
+      <p:sp>
+        <p:nvSpPr>
+          <p:cNvPr id="4" name="Foliennummernplatzhalter 3">
+            <a:extLst>
+              <a:ext uri="{FF2B5EF4-FFF2-40B4-BE49-F238E27FC236}">
+                <a16:creationId xmlns:a16="http://schemas.microsoft.com/office/drawing/2014/main" id="{20F03F23-06F2-7132-2B7E-9059949FB89F}"/>
+              </a:ext>
+            </a:extLst>
+          </p:cNvPr>
+          <p:cNvSpPr>
+            <a:spLocks noGrp="1"/>
+          </p:cNvSpPr>
+          <p:nvPr>
+            <p:ph type="sldNum" sz="quarter" idx="5"/>
+          </p:nvPr>
+        </p:nvSpPr>
+        <p:spPr/>
+        <p:txBody>
+          <a:bodyPr/>
+          <a:lstStyle/>
+          <a:p>
+            <a:fld id="{B9A045E6-D734-4DB2-BEE5-DF972DD20CA2}" type="slidenum">
+              <a:rPr lang="de-DE" smtClean="0"/>
+              <a:t>5</a:t>
+            </a:fld>
+            <a:endParaRPr lang="de-DE"/>
+          </a:p>
+        </p:txBody>
+      </p:sp>
+    </p:spTree>
+    <p:extLst>
+      <p:ext uri="{BB962C8B-B14F-4D97-AF65-F5344CB8AC3E}">
+        <p14:creationId xmlns:p14="http://schemas.microsoft.com/office/powerpoint/2010/main" val="2389017829"/>
+      </p:ext>
+    </p:extLst>
+  </p:cSld>
+  <p:clrMapOvr>
+    <a:masterClrMapping/>
+  </p:clrMapOvr>
+</p:notes>
+</file>
+
+<file path=ppt/notesSlides/notesSlide6.xml><?xml version="1.0" encoding="utf-8"?>
+<p:notes xmlns:a="http://schemas.openxmlformats.org/drawingml/2006/main" xmlns:r="http://schemas.openxmlformats.org/officeDocument/2006/relationships" xmlns:p="http://schemas.openxmlformats.org/presentationml/2006/main">
+  <p:cSld>
+    <p:spTree>
+      <p:nvGrpSpPr>
+        <p:cNvPr id="1" name="">
+          <a:extLst>
+            <a:ext uri="{FF2B5EF4-FFF2-40B4-BE49-F238E27FC236}">
               <a16:creationId xmlns:a16="http://schemas.microsoft.com/office/drawing/2014/main" id="{90226C96-8DCD-2F99-2BFE-7FD4C10A5E26}"/>
             </a:ext>
           </a:extLst>
@@ -2097,7 +2423,7 @@
           <a:p>
             <a:fld id="{B9A045E6-D734-4DB2-BEE5-DF972DD20CA2}" type="slidenum">
               <a:rPr lang="de-DE" smtClean="0"/>
-              <a:t>5</a:t>
+              <a:t>6</a:t>
             </a:fld>
             <a:endParaRPr lang="de-DE"/>
           </a:p>
@@ -2116,7 +2442,7 @@
 </p:notes>
 </file>
 
-<file path=ppt/notesSlides/notesSlide6.xml><?xml version="1.0" encoding="utf-8"?>
+<file path=ppt/notesSlides/notesSlide7.xml><?xml version="1.0" encoding="utf-8"?>
 <p:notes xmlns:a="http://schemas.openxmlformats.org/drawingml/2006/main" xmlns:r="http://schemas.openxmlformats.org/officeDocument/2006/relationships" xmlns:p="http://schemas.openxmlformats.org/presentationml/2006/main">
   <p:cSld>
     <p:spTree>
@@ -2205,7 +2531,7 @@
           <a:p>
             <a:fld id="{B9A045E6-D734-4DB2-BEE5-DF972DD20CA2}" type="slidenum">
               <a:rPr lang="de-DE" smtClean="0"/>
-              <a:t>6</a:t>
+              <a:t>7</a:t>
             </a:fld>
             <a:endParaRPr lang="de-DE"/>
           </a:p>
@@ -2224,7 +2550,115 @@
 </p:notes>
 </file>
 
-<file path=ppt/notesSlides/notesSlide7.xml><?xml version="1.0" encoding="utf-8"?>
+<file path=ppt/notesSlides/notesSlide8.xml><?xml version="1.0" encoding="utf-8"?>
+<p:notes xmlns:a="http://schemas.openxmlformats.org/drawingml/2006/main" xmlns:r="http://schemas.openxmlformats.org/officeDocument/2006/relationships" xmlns:p="http://schemas.openxmlformats.org/presentationml/2006/main">
+  <p:cSld>
+    <p:spTree>
+      <p:nvGrpSpPr>
+        <p:cNvPr id="1" name="">
+          <a:extLst>
+            <a:ext uri="{FF2B5EF4-FFF2-40B4-BE49-F238E27FC236}">
+              <a16:creationId xmlns:a16="http://schemas.microsoft.com/office/drawing/2014/main" id="{56CF3D1D-2F12-05C0-F908-989A3670183A}"/>
+            </a:ext>
+          </a:extLst>
+        </p:cNvPr>
+        <p:cNvGrpSpPr/>
+        <p:nvPr/>
+      </p:nvGrpSpPr>
+      <p:grpSpPr>
+        <a:xfrm>
+          <a:off x="0" y="0"/>
+          <a:ext cx="0" cy="0"/>
+          <a:chOff x="0" y="0"/>
+          <a:chExt cx="0" cy="0"/>
+        </a:xfrm>
+      </p:grpSpPr>
+      <p:sp>
+        <p:nvSpPr>
+          <p:cNvPr id="2" name="Folienbildplatzhalter 1">
+            <a:extLst>
+              <a:ext uri="{FF2B5EF4-FFF2-40B4-BE49-F238E27FC236}">
+                <a16:creationId xmlns:a16="http://schemas.microsoft.com/office/drawing/2014/main" id="{40B392A6-3B9C-CC72-E0EF-DD6D48AF64BC}"/>
+              </a:ext>
+            </a:extLst>
+          </p:cNvPr>
+          <p:cNvSpPr>
+            <a:spLocks noGrp="1" noRot="1" noChangeAspect="1"/>
+          </p:cNvSpPr>
+          <p:nvPr>
+            <p:ph type="sldImg"/>
+          </p:nvPr>
+        </p:nvSpPr>
+        <p:spPr/>
+      </p:sp>
+      <p:sp>
+        <p:nvSpPr>
+          <p:cNvPr id="3" name="Notizenplatzhalter 2">
+            <a:extLst>
+              <a:ext uri="{FF2B5EF4-FFF2-40B4-BE49-F238E27FC236}">
+                <a16:creationId xmlns:a16="http://schemas.microsoft.com/office/drawing/2014/main" id="{4EF06940-ACC0-E30A-CF86-9658739C9A80}"/>
+              </a:ext>
+            </a:extLst>
+          </p:cNvPr>
+          <p:cNvSpPr>
+            <a:spLocks noGrp="1"/>
+          </p:cNvSpPr>
+          <p:nvPr>
+            <p:ph type="body" idx="1"/>
+          </p:nvPr>
+        </p:nvSpPr>
+        <p:spPr/>
+        <p:txBody>
+          <a:bodyPr/>
+          <a:lstStyle/>
+          <a:p>
+            <a:endParaRPr lang="de-DE"/>
+          </a:p>
+        </p:txBody>
+      </p:sp>
+      <p:sp>
+        <p:nvSpPr>
+          <p:cNvPr id="4" name="Foliennummernplatzhalter 3">
+            <a:extLst>
+              <a:ext uri="{FF2B5EF4-FFF2-40B4-BE49-F238E27FC236}">
+                <a16:creationId xmlns:a16="http://schemas.microsoft.com/office/drawing/2014/main" id="{1F53247A-15FE-EE17-2D7B-29D895C74D6D}"/>
+              </a:ext>
+            </a:extLst>
+          </p:cNvPr>
+          <p:cNvSpPr>
+            <a:spLocks noGrp="1"/>
+          </p:cNvSpPr>
+          <p:nvPr>
+            <p:ph type="sldNum" sz="quarter" idx="5"/>
+          </p:nvPr>
+        </p:nvSpPr>
+        <p:spPr/>
+        <p:txBody>
+          <a:bodyPr/>
+          <a:lstStyle/>
+          <a:p>
+            <a:fld id="{B9A045E6-D734-4DB2-BEE5-DF972DD20CA2}" type="slidenum">
+              <a:rPr lang="de-DE" smtClean="0"/>
+              <a:t>8</a:t>
+            </a:fld>
+            <a:endParaRPr lang="de-DE"/>
+          </a:p>
+        </p:txBody>
+      </p:sp>
+    </p:spTree>
+    <p:extLst>
+      <p:ext uri="{BB962C8B-B14F-4D97-AF65-F5344CB8AC3E}">
+        <p14:creationId xmlns:p14="http://schemas.microsoft.com/office/powerpoint/2010/main" val="2234041128"/>
+      </p:ext>
+    </p:extLst>
+  </p:cSld>
+  <p:clrMapOvr>
+    <a:masterClrMapping/>
+  </p:clrMapOvr>
+</p:notes>
+</file>
+
+<file path=ppt/notesSlides/notesSlide9.xml><?xml version="1.0" encoding="utf-8"?>
 <p:notes xmlns:a="http://schemas.openxmlformats.org/drawingml/2006/main" xmlns:r="http://schemas.openxmlformats.org/officeDocument/2006/relationships" xmlns:p="http://schemas.openxmlformats.org/presentationml/2006/main">
   <p:cSld>
     <p:spTree>
@@ -2313,7 +2747,7 @@
           <a:p>
             <a:fld id="{B9A045E6-D734-4DB2-BEE5-DF972DD20CA2}" type="slidenum">
               <a:rPr lang="de-DE" smtClean="0"/>
-              <a:t>7</a:t>
+              <a:t>9</a:t>
             </a:fld>
             <a:endParaRPr lang="de-DE"/>
           </a:p>
@@ -2323,222 +2757,6 @@
     <p:extLst>
       <p:ext uri="{BB962C8B-B14F-4D97-AF65-F5344CB8AC3E}">
         <p14:creationId xmlns:p14="http://schemas.microsoft.com/office/powerpoint/2010/main" val="683762941"/>
-      </p:ext>
-    </p:extLst>
-  </p:cSld>
-  <p:clrMapOvr>
-    <a:masterClrMapping/>
-  </p:clrMapOvr>
-</p:notes>
-</file>
-
-<file path=ppt/notesSlides/notesSlide8.xml><?xml version="1.0" encoding="utf-8"?>
-<p:notes xmlns:a="http://schemas.openxmlformats.org/drawingml/2006/main" xmlns:r="http://schemas.openxmlformats.org/officeDocument/2006/relationships" xmlns:p="http://schemas.openxmlformats.org/presentationml/2006/main">
-  <p:cSld>
-    <p:spTree>
-      <p:nvGrpSpPr>
-        <p:cNvPr id="1" name="">
-          <a:extLst>
-            <a:ext uri="{FF2B5EF4-FFF2-40B4-BE49-F238E27FC236}">
-              <a16:creationId xmlns:a16="http://schemas.microsoft.com/office/drawing/2014/main" id="{3F5006F6-7337-0E08-FDEA-FEC611CD45B5}"/>
-            </a:ext>
-          </a:extLst>
-        </p:cNvPr>
-        <p:cNvGrpSpPr/>
-        <p:nvPr/>
-      </p:nvGrpSpPr>
-      <p:grpSpPr>
-        <a:xfrm>
-          <a:off x="0" y="0"/>
-          <a:ext cx="0" cy="0"/>
-          <a:chOff x="0" y="0"/>
-          <a:chExt cx="0" cy="0"/>
-        </a:xfrm>
-      </p:grpSpPr>
-      <p:sp>
-        <p:nvSpPr>
-          <p:cNvPr id="2" name="Folienbildplatzhalter 1">
-            <a:extLst>
-              <a:ext uri="{FF2B5EF4-FFF2-40B4-BE49-F238E27FC236}">
-                <a16:creationId xmlns:a16="http://schemas.microsoft.com/office/drawing/2014/main" id="{755A21C7-7DE7-8C73-B0BB-A6C8B479B1C8}"/>
-              </a:ext>
-            </a:extLst>
-          </p:cNvPr>
-          <p:cNvSpPr>
-            <a:spLocks noGrp="1" noRot="1" noChangeAspect="1"/>
-          </p:cNvSpPr>
-          <p:nvPr>
-            <p:ph type="sldImg"/>
-          </p:nvPr>
-        </p:nvSpPr>
-        <p:spPr/>
-      </p:sp>
-      <p:sp>
-        <p:nvSpPr>
-          <p:cNvPr id="3" name="Notizenplatzhalter 2">
-            <a:extLst>
-              <a:ext uri="{FF2B5EF4-FFF2-40B4-BE49-F238E27FC236}">
-                <a16:creationId xmlns:a16="http://schemas.microsoft.com/office/drawing/2014/main" id="{0686404F-33DD-44A4-2B3B-29E7D8281F14}"/>
-              </a:ext>
-            </a:extLst>
-          </p:cNvPr>
-          <p:cNvSpPr>
-            <a:spLocks noGrp="1"/>
-          </p:cNvSpPr>
-          <p:nvPr>
-            <p:ph type="body" idx="1"/>
-          </p:nvPr>
-        </p:nvSpPr>
-        <p:spPr/>
-        <p:txBody>
-          <a:bodyPr/>
-          <a:lstStyle/>
-          <a:p>
-            <a:endParaRPr lang="de-DE"/>
-          </a:p>
-        </p:txBody>
-      </p:sp>
-      <p:sp>
-        <p:nvSpPr>
-          <p:cNvPr id="4" name="Foliennummernplatzhalter 3">
-            <a:extLst>
-              <a:ext uri="{FF2B5EF4-FFF2-40B4-BE49-F238E27FC236}">
-                <a16:creationId xmlns:a16="http://schemas.microsoft.com/office/drawing/2014/main" id="{7ACA931F-F7AF-EE5A-FC0E-E2FB963E5155}"/>
-              </a:ext>
-            </a:extLst>
-          </p:cNvPr>
-          <p:cNvSpPr>
-            <a:spLocks noGrp="1"/>
-          </p:cNvSpPr>
-          <p:nvPr>
-            <p:ph type="sldNum" sz="quarter" idx="5"/>
-          </p:nvPr>
-        </p:nvSpPr>
-        <p:spPr/>
-        <p:txBody>
-          <a:bodyPr/>
-          <a:lstStyle/>
-          <a:p>
-            <a:fld id="{B9A045E6-D734-4DB2-BEE5-DF972DD20CA2}" type="slidenum">
-              <a:rPr lang="de-DE" smtClean="0"/>
-              <a:t>8</a:t>
-            </a:fld>
-            <a:endParaRPr lang="de-DE"/>
-          </a:p>
-        </p:txBody>
-      </p:sp>
-    </p:spTree>
-    <p:extLst>
-      <p:ext uri="{BB962C8B-B14F-4D97-AF65-F5344CB8AC3E}">
-        <p14:creationId xmlns:p14="http://schemas.microsoft.com/office/powerpoint/2010/main" val="3411633440"/>
-      </p:ext>
-    </p:extLst>
-  </p:cSld>
-  <p:clrMapOvr>
-    <a:masterClrMapping/>
-  </p:clrMapOvr>
-</p:notes>
-</file>
-
-<file path=ppt/notesSlides/notesSlide9.xml><?xml version="1.0" encoding="utf-8"?>
-<p:notes xmlns:a="http://schemas.openxmlformats.org/drawingml/2006/main" xmlns:r="http://schemas.openxmlformats.org/officeDocument/2006/relationships" xmlns:p="http://schemas.openxmlformats.org/presentationml/2006/main">
-  <p:cSld>
-    <p:spTree>
-      <p:nvGrpSpPr>
-        <p:cNvPr id="1" name="">
-          <a:extLst>
-            <a:ext uri="{FF2B5EF4-FFF2-40B4-BE49-F238E27FC236}">
-              <a16:creationId xmlns:a16="http://schemas.microsoft.com/office/drawing/2014/main" id="{21432590-EDD1-297C-7F91-ED1C0FED0938}"/>
-            </a:ext>
-          </a:extLst>
-        </p:cNvPr>
-        <p:cNvGrpSpPr/>
-        <p:nvPr/>
-      </p:nvGrpSpPr>
-      <p:grpSpPr>
-        <a:xfrm>
-          <a:off x="0" y="0"/>
-          <a:ext cx="0" cy="0"/>
-          <a:chOff x="0" y="0"/>
-          <a:chExt cx="0" cy="0"/>
-        </a:xfrm>
-      </p:grpSpPr>
-      <p:sp>
-        <p:nvSpPr>
-          <p:cNvPr id="2" name="Folienbildplatzhalter 1">
-            <a:extLst>
-              <a:ext uri="{FF2B5EF4-FFF2-40B4-BE49-F238E27FC236}">
-                <a16:creationId xmlns:a16="http://schemas.microsoft.com/office/drawing/2014/main" id="{77AFDF40-C453-B040-1533-6D92B0EFEBAB}"/>
-              </a:ext>
-            </a:extLst>
-          </p:cNvPr>
-          <p:cNvSpPr>
-            <a:spLocks noGrp="1" noRot="1" noChangeAspect="1"/>
-          </p:cNvSpPr>
-          <p:nvPr>
-            <p:ph type="sldImg"/>
-          </p:nvPr>
-        </p:nvSpPr>
-        <p:spPr/>
-      </p:sp>
-      <p:sp>
-        <p:nvSpPr>
-          <p:cNvPr id="3" name="Notizenplatzhalter 2">
-            <a:extLst>
-              <a:ext uri="{FF2B5EF4-FFF2-40B4-BE49-F238E27FC236}">
-                <a16:creationId xmlns:a16="http://schemas.microsoft.com/office/drawing/2014/main" id="{FE441DB5-AF0A-2492-5580-ECCD01F57A6A}"/>
-              </a:ext>
-            </a:extLst>
-          </p:cNvPr>
-          <p:cNvSpPr>
-            <a:spLocks noGrp="1"/>
-          </p:cNvSpPr>
-          <p:nvPr>
-            <p:ph type="body" idx="1"/>
-          </p:nvPr>
-        </p:nvSpPr>
-        <p:spPr/>
-        <p:txBody>
-          <a:bodyPr/>
-          <a:lstStyle/>
-          <a:p>
-            <a:endParaRPr lang="de-DE"/>
-          </a:p>
-        </p:txBody>
-      </p:sp>
-      <p:sp>
-        <p:nvSpPr>
-          <p:cNvPr id="4" name="Foliennummernplatzhalter 3">
-            <a:extLst>
-              <a:ext uri="{FF2B5EF4-FFF2-40B4-BE49-F238E27FC236}">
-                <a16:creationId xmlns:a16="http://schemas.microsoft.com/office/drawing/2014/main" id="{2FB70481-AD77-D858-C09A-05D73224EBD2}"/>
-              </a:ext>
-            </a:extLst>
-          </p:cNvPr>
-          <p:cNvSpPr>
-            <a:spLocks noGrp="1"/>
-          </p:cNvSpPr>
-          <p:nvPr>
-            <p:ph type="sldNum" sz="quarter" idx="5"/>
-          </p:nvPr>
-        </p:nvSpPr>
-        <p:spPr/>
-        <p:txBody>
-          <a:bodyPr/>
-          <a:lstStyle/>
-          <a:p>
-            <a:fld id="{B9A045E6-D734-4DB2-BEE5-DF972DD20CA2}" type="slidenum">
-              <a:rPr lang="de-DE" smtClean="0"/>
-              <a:t>9</a:t>
-            </a:fld>
-            <a:endParaRPr lang="de-DE"/>
-          </a:p>
-        </p:txBody>
-      </p:sp>
-    </p:spTree>
-    <p:extLst>
-      <p:ext uri="{BB962C8B-B14F-4D97-AF65-F5344CB8AC3E}">
-        <p14:creationId xmlns:p14="http://schemas.microsoft.com/office/powerpoint/2010/main" val="2046582652"/>
       </p:ext>
     </p:extLst>
   </p:cSld>
@@ -9286,7 +9504,7 @@
             </a:br>
             <a:r>
               <a:rPr lang="en-GB" sz="2000" dirty="0"/>
-              <a:t>05.07.2026</a:t>
+              <a:t>20.07.2026</a:t>
             </a:r>
             <a:endParaRPr lang="en-GB" sz="2000" noProof="0" dirty="0">
               <a:latin typeface="+mj-lt"/>
@@ -9572,6 +9790,329 @@
         <p:cNvPr id="1" name="">
           <a:extLst>
             <a:ext uri="{FF2B5EF4-FFF2-40B4-BE49-F238E27FC236}">
+              <a16:creationId xmlns:a16="http://schemas.microsoft.com/office/drawing/2014/main" id="{075BAF33-E329-F0AC-E12B-E83439358354}"/>
+            </a:ext>
+          </a:extLst>
+        </p:cNvPr>
+        <p:cNvGrpSpPr/>
+        <p:nvPr/>
+      </p:nvGrpSpPr>
+      <p:grpSpPr>
+        <a:xfrm>
+          <a:off x="0" y="0"/>
+          <a:ext cx="0" cy="0"/>
+          <a:chOff x="0" y="0"/>
+          <a:chExt cx="0" cy="0"/>
+        </a:xfrm>
+      </p:grpSpPr>
+      <p:sp>
+        <p:nvSpPr>
+          <p:cNvPr id="13" name="Titel">
+            <a:extLst>
+              <a:ext uri="{FF2B5EF4-FFF2-40B4-BE49-F238E27FC236}">
+                <a16:creationId xmlns:a16="http://schemas.microsoft.com/office/drawing/2014/main" id="{7CC364DB-CFDA-3538-DE36-A6FBE19B3D30}"/>
+              </a:ext>
+            </a:extLst>
+          </p:cNvPr>
+          <p:cNvSpPr txBox="1">
+            <a:spLocks noGrp="1"/>
+          </p:cNvSpPr>
+          <p:nvPr>
+            <p:ph type="title"/>
+          </p:nvPr>
+        </p:nvSpPr>
+        <p:spPr>
+          <a:prstGeom prst="rect">
+            <a:avLst/>
+          </a:prstGeom>
+        </p:spPr>
+        <p:txBody>
+          <a:bodyPr vert="horz" lIns="0" tIns="0" rIns="0" bIns="0" rtlCol="0" anchor="t" anchorCtr="0">
+            <a:noAutofit/>
+          </a:bodyPr>
+          <a:lstStyle>
+            <a:lvl1pPr marL="0" indent="0" algn="l" defTabSz="685800" rtl="0" eaLnBrk="1" latinLnBrk="0" hangingPunct="1">
+              <a:lnSpc>
+                <a:spcPct val="100000"/>
+              </a:lnSpc>
+              <a:spcBef>
+                <a:spcPts val="0"/>
+              </a:spcBef>
+              <a:buFont typeface="Arial" panose="020B0604020202020204" pitchFamily="34" charset="0"/>
+              <a:buNone/>
+              <a:defRPr sz="2700" b="0" kern="1200" baseline="0">
+                <a:solidFill>
+                  <a:schemeClr val="tx2"/>
+                </a:solidFill>
+                <a:latin typeface="+mn-lt"/>
+                <a:ea typeface="+mj-ea"/>
+                <a:cs typeface="+mj-cs"/>
+              </a:defRPr>
+            </a:lvl1pPr>
+          </a:lstStyle>
+          <a:p>
+            <a:r>
+              <a:rPr lang="en-GB" b="1" noProof="0" dirty="0"/>
+              <a:t>Approach</a:t>
+            </a:r>
+          </a:p>
+        </p:txBody>
+      </p:sp>
+      <p:sp>
+        <p:nvSpPr>
+          <p:cNvPr id="3" name="Folientext">
+            <a:extLst>
+              <a:ext uri="{FF2B5EF4-FFF2-40B4-BE49-F238E27FC236}">
+                <a16:creationId xmlns:a16="http://schemas.microsoft.com/office/drawing/2014/main" id="{373B75CC-77F2-6B4F-6225-2DD4F980C608}"/>
+              </a:ext>
+            </a:extLst>
+          </p:cNvPr>
+          <p:cNvSpPr>
+            <a:spLocks noGrp="1"/>
+          </p:cNvSpPr>
+          <p:nvPr>
+            <p:ph idx="1"/>
+          </p:nvPr>
+        </p:nvSpPr>
+        <p:spPr>
+          <a:xfrm>
+            <a:off x="468000" y="915566"/>
+            <a:ext cx="8424480" cy="3405888"/>
+          </a:xfrm>
+        </p:spPr>
+        <p:txBody>
+          <a:bodyPr/>
+          <a:lstStyle/>
+          <a:p>
+            <a:pPr lvl="2">
+              <a:lnSpc>
+                <a:spcPct val="100000"/>
+              </a:lnSpc>
+              <a:spcAft>
+                <a:spcPts val="601"/>
+              </a:spcAft>
+              <a:buClr>
+                <a:srgbClr val="003560"/>
+              </a:buClr>
+              <a:buSzPct val="130000"/>
+              <a:buFont typeface="Wingdings" charset="2"/>
+              <a:buChar char=""/>
+            </a:pPr>
+            <a:r>
+              <a:rPr lang="en-GB" sz="1800" spc="-1" noProof="0" dirty="0">
+                <a:solidFill>
+                  <a:schemeClr val="dk2"/>
+                </a:solidFill>
+              </a:rPr>
+              <a:t>text</a:t>
+            </a:r>
+          </a:p>
+        </p:txBody>
+      </p:sp>
+      <p:sp>
+        <p:nvSpPr>
+          <p:cNvPr id="14" name="Foliennummer">
+            <a:extLst>
+              <a:ext uri="{FF2B5EF4-FFF2-40B4-BE49-F238E27FC236}">
+                <a16:creationId xmlns:a16="http://schemas.microsoft.com/office/drawing/2014/main" id="{FC05A18E-4880-FB5A-7633-4A7B38CD3222}"/>
+              </a:ext>
+            </a:extLst>
+          </p:cNvPr>
+          <p:cNvSpPr>
+            <a:spLocks noGrp="1"/>
+          </p:cNvSpPr>
+          <p:nvPr>
+            <p:ph type="sldNum" sz="quarter" idx="12"/>
+          </p:nvPr>
+        </p:nvSpPr>
+        <p:spPr/>
+        <p:txBody>
+          <a:bodyPr/>
+          <a:lstStyle/>
+          <a:p>
+            <a:fld id="{6C8FC03C-C266-4645-ABC5-645062898383}" type="slidenum">
+              <a:rPr lang="en-GB" noProof="0" smtClean="0"/>
+              <a:pPr/>
+              <a:t>10</a:t>
+            </a:fld>
+            <a:r>
+              <a:rPr lang="en-GB" noProof="0" dirty="0"/>
+              <a:t> </a:t>
+            </a:r>
+          </a:p>
+        </p:txBody>
+      </p:sp>
+    </p:spTree>
+    <p:extLst>
+      <p:ext uri="{BB962C8B-B14F-4D97-AF65-F5344CB8AC3E}">
+        <p14:creationId xmlns:p14="http://schemas.microsoft.com/office/powerpoint/2010/main" val="261889466"/>
+      </p:ext>
+    </p:extLst>
+  </p:cSld>
+  <p:clrMapOvr>
+    <a:masterClrMapping/>
+  </p:clrMapOvr>
+</p:sld>
+</file>
+
+<file path=ppt/slides/slide11.xml><?xml version="1.0" encoding="utf-8"?>
+<p:sld xmlns:a="http://schemas.openxmlformats.org/drawingml/2006/main" xmlns:r="http://schemas.openxmlformats.org/officeDocument/2006/relationships" xmlns:p="http://schemas.openxmlformats.org/presentationml/2006/main">
+  <p:cSld>
+    <p:spTree>
+      <p:nvGrpSpPr>
+        <p:cNvPr id="1" name="">
+          <a:extLst>
+            <a:ext uri="{FF2B5EF4-FFF2-40B4-BE49-F238E27FC236}">
+              <a16:creationId xmlns:a16="http://schemas.microsoft.com/office/drawing/2014/main" id="{4B202761-AD3F-6EC1-7C22-239E83F948B1}"/>
+            </a:ext>
+          </a:extLst>
+        </p:cNvPr>
+        <p:cNvGrpSpPr/>
+        <p:nvPr/>
+      </p:nvGrpSpPr>
+      <p:grpSpPr>
+        <a:xfrm>
+          <a:off x="0" y="0"/>
+          <a:ext cx="0" cy="0"/>
+          <a:chOff x="0" y="0"/>
+          <a:chExt cx="0" cy="0"/>
+        </a:xfrm>
+      </p:grpSpPr>
+      <p:sp>
+        <p:nvSpPr>
+          <p:cNvPr id="13" name="Titel">
+            <a:extLst>
+              <a:ext uri="{FF2B5EF4-FFF2-40B4-BE49-F238E27FC236}">
+                <a16:creationId xmlns:a16="http://schemas.microsoft.com/office/drawing/2014/main" id="{E1716816-5A13-8870-3970-C4CE52F29411}"/>
+              </a:ext>
+            </a:extLst>
+          </p:cNvPr>
+          <p:cNvSpPr txBox="1">
+            <a:spLocks noGrp="1"/>
+          </p:cNvSpPr>
+          <p:nvPr>
+            <p:ph type="title"/>
+          </p:nvPr>
+        </p:nvSpPr>
+        <p:spPr>
+          <a:xfrm>
+            <a:off x="0" y="0"/>
+            <a:ext cx="9144000" cy="4659982"/>
+          </a:xfrm>
+          <a:prstGeom prst="rect">
+            <a:avLst/>
+          </a:prstGeom>
+        </p:spPr>
+        <p:txBody>
+          <a:bodyPr vert="horz" lIns="0" tIns="0" rIns="0" bIns="0" rtlCol="0" anchor="t" anchorCtr="0">
+            <a:noAutofit/>
+          </a:bodyPr>
+          <a:lstStyle>
+            <a:lvl1pPr marL="0" indent="0" algn="l" defTabSz="685800" rtl="0" eaLnBrk="1" latinLnBrk="0" hangingPunct="1">
+              <a:lnSpc>
+                <a:spcPct val="100000"/>
+              </a:lnSpc>
+              <a:spcBef>
+                <a:spcPts val="0"/>
+              </a:spcBef>
+              <a:buFont typeface="Arial" panose="020B0604020202020204" pitchFamily="34" charset="0"/>
+              <a:buNone/>
+              <a:defRPr sz="2700" b="0" kern="1200" baseline="0">
+                <a:solidFill>
+                  <a:schemeClr val="tx2"/>
+                </a:solidFill>
+                <a:latin typeface="+mn-lt"/>
+                <a:ea typeface="+mj-ea"/>
+                <a:cs typeface="+mj-cs"/>
+              </a:defRPr>
+            </a:lvl1pPr>
+          </a:lstStyle>
+          <a:p>
+            <a:pPr algn="ctr"/>
+            <a:br>
+              <a:rPr lang="en-GB" sz="4000" b="1" noProof="0" dirty="0">
+                <a:latin typeface="Arial" panose="020B0604020202020204" pitchFamily="34" charset="0"/>
+                <a:cs typeface="Arial" panose="020B0604020202020204" pitchFamily="34" charset="0"/>
+              </a:rPr>
+            </a:br>
+            <a:br>
+              <a:rPr lang="en-GB" sz="4000" b="1" noProof="0" dirty="0">
+                <a:latin typeface="Arial" panose="020B0604020202020204" pitchFamily="34" charset="0"/>
+                <a:cs typeface="Arial" panose="020B0604020202020204" pitchFamily="34" charset="0"/>
+              </a:rPr>
+            </a:br>
+            <a:br>
+              <a:rPr lang="en-GB" sz="4000" b="1" noProof="0" dirty="0">
+                <a:latin typeface="Arial" panose="020B0604020202020204" pitchFamily="34" charset="0"/>
+                <a:cs typeface="Arial" panose="020B0604020202020204" pitchFamily="34" charset="0"/>
+              </a:rPr>
+            </a:br>
+            <a:r>
+              <a:rPr lang="en-GB" sz="4000" b="1" noProof="0" dirty="0">
+                <a:latin typeface="Arial" panose="020B0604020202020204" pitchFamily="34" charset="0"/>
+                <a:cs typeface="Arial" panose="020B0604020202020204" pitchFamily="34" charset="0"/>
+              </a:rPr>
+              <a:t>Experiments</a:t>
+            </a:r>
+            <a:endParaRPr lang="en-GB" sz="4000" b="1" noProof="0" dirty="0"/>
+          </a:p>
+        </p:txBody>
+      </p:sp>
+      <p:sp>
+        <p:nvSpPr>
+          <p:cNvPr id="14" name="Foliennummer">
+            <a:extLst>
+              <a:ext uri="{FF2B5EF4-FFF2-40B4-BE49-F238E27FC236}">
+                <a16:creationId xmlns:a16="http://schemas.microsoft.com/office/drawing/2014/main" id="{C5C94A7D-15D0-D436-7DE0-AC16BB472F73}"/>
+              </a:ext>
+            </a:extLst>
+          </p:cNvPr>
+          <p:cNvSpPr>
+            <a:spLocks noGrp="1"/>
+          </p:cNvSpPr>
+          <p:nvPr>
+            <p:ph type="sldNum" sz="quarter" idx="12"/>
+          </p:nvPr>
+        </p:nvSpPr>
+        <p:spPr/>
+        <p:txBody>
+          <a:bodyPr/>
+          <a:lstStyle/>
+          <a:p>
+            <a:pPr algn="ctr"/>
+            <a:fld id="{6C8FC03C-C266-4645-ABC5-645062898383}" type="slidenum">
+              <a:rPr lang="en-GB" noProof="0" smtClean="0"/>
+              <a:pPr algn="ctr"/>
+              <a:t>11</a:t>
+            </a:fld>
+            <a:r>
+              <a:rPr lang="en-GB" noProof="0" dirty="0"/>
+              <a:t> </a:t>
+            </a:r>
+          </a:p>
+        </p:txBody>
+      </p:sp>
+    </p:spTree>
+    <p:extLst>
+      <p:ext uri="{BB962C8B-B14F-4D97-AF65-F5344CB8AC3E}">
+        <p14:creationId xmlns:p14="http://schemas.microsoft.com/office/powerpoint/2010/main" val="2888152733"/>
+      </p:ext>
+    </p:extLst>
+  </p:cSld>
+  <p:clrMapOvr>
+    <a:masterClrMapping/>
+  </p:clrMapOvr>
+</p:sld>
+</file>
+
+<file path=ppt/slides/slide12.xml><?xml version="1.0" encoding="utf-8"?>
+<p:sld xmlns:a="http://schemas.openxmlformats.org/drawingml/2006/main" xmlns:r="http://schemas.openxmlformats.org/officeDocument/2006/relationships" xmlns:p="http://schemas.openxmlformats.org/presentationml/2006/main">
+  <p:cSld>
+    <p:spTree>
+      <p:nvGrpSpPr>
+        <p:cNvPr id="1" name="">
+          <a:extLst>
+            <a:ext uri="{FF2B5EF4-FFF2-40B4-BE49-F238E27FC236}">
               <a16:creationId xmlns:a16="http://schemas.microsoft.com/office/drawing/2014/main" id="{4126906E-D117-275F-A7E3-9C1F1A4F8F97}"/>
             </a:ext>
           </a:extLst>
@@ -9715,7 +10256,7 @@
             <a:fld id="{6C8FC03C-C266-4645-ABC5-645062898383}" type="slidenum">
               <a:rPr lang="en-GB" noProof="0" smtClean="0"/>
               <a:pPr/>
-              <a:t>10</a:t>
+              <a:t>12</a:t>
             </a:fld>
             <a:r>
               <a:rPr lang="en-GB" noProof="0" dirty="0"/>
@@ -9737,7 +10278,7 @@
 </p:sld>
 </file>
 
-<file path=ppt/slides/slide11.xml><?xml version="1.0" encoding="utf-8"?>
+<file path=ppt/slides/slide13.xml><?xml version="1.0" encoding="utf-8"?>
 <p:sld xmlns:a="http://schemas.openxmlformats.org/drawingml/2006/main" xmlns:r="http://schemas.openxmlformats.org/officeDocument/2006/relationships" xmlns:p="http://schemas.openxmlformats.org/presentationml/2006/main">
   <p:cSld>
     <p:spTree>
@@ -9865,7 +10406,7 @@
             <a:fld id="{6C8FC03C-C266-4645-ABC5-645062898383}" type="slidenum">
               <a:rPr lang="en-GB" noProof="0" smtClean="0"/>
               <a:pPr algn="ctr"/>
-              <a:t>11</a:t>
+              <a:t>13</a:t>
             </a:fld>
             <a:r>
               <a:rPr lang="en-GB" noProof="0" dirty="0"/>
@@ -9887,7 +10428,7 @@
 </p:sld>
 </file>
 
-<file path=ppt/slides/slide12.xml><?xml version="1.0" encoding="utf-8"?>
+<file path=ppt/slides/slide14.xml><?xml version="1.0" encoding="utf-8"?>
 <p:sld xmlns:a="http://schemas.openxmlformats.org/drawingml/2006/main" xmlns:r="http://schemas.openxmlformats.org/officeDocument/2006/relationships" xmlns:p="http://schemas.openxmlformats.org/presentationml/2006/main">
   <p:cSld>
     <p:spTree>
@@ -10038,7 +10579,7 @@
             <a:fld id="{6C8FC03C-C266-4645-ABC5-645062898383}" type="slidenum">
               <a:rPr lang="en-GB" noProof="0" smtClean="0"/>
               <a:pPr/>
-              <a:t>12</a:t>
+              <a:t>14</a:t>
             </a:fld>
             <a:r>
               <a:rPr lang="en-GB" noProof="0" dirty="0"/>
@@ -10060,7 +10601,7 @@
 </p:sld>
 </file>
 
-<file path=ppt/slides/slide13.xml><?xml version="1.0" encoding="utf-8"?>
+<file path=ppt/slides/slide15.xml><?xml version="1.0" encoding="utf-8"?>
 <p:sld xmlns:a="http://schemas.openxmlformats.org/drawingml/2006/main" xmlns:r="http://schemas.openxmlformats.org/officeDocument/2006/relationships" xmlns:p="http://schemas.openxmlformats.org/presentationml/2006/main">
   <p:cSld>
     <p:spTree>
@@ -10188,7 +10729,7 @@
             <a:fld id="{6C8FC03C-C266-4645-ABC5-645062898383}" type="slidenum">
               <a:rPr lang="en-GB" noProof="0" smtClean="0"/>
               <a:pPr algn="ctr"/>
-              <a:t>13</a:t>
+              <a:t>15</a:t>
             </a:fld>
             <a:r>
               <a:rPr lang="en-GB" noProof="0" dirty="0"/>
@@ -10210,7 +10751,7 @@
 </p:sld>
 </file>
 
-<file path=ppt/slides/slide14.xml><?xml version="1.0" encoding="utf-8"?>
+<file path=ppt/slides/slide16.xml><?xml version="1.0" encoding="utf-8"?>
 <p:sld xmlns:a="http://schemas.openxmlformats.org/drawingml/2006/main" xmlns:r="http://schemas.openxmlformats.org/officeDocument/2006/relationships" xmlns:p="http://schemas.openxmlformats.org/presentationml/2006/main">
   <p:cSld>
     <p:spTree>
@@ -10361,7 +10902,7 @@
             <a:fld id="{6C8FC03C-C266-4645-ABC5-645062898383}" type="slidenum">
               <a:rPr lang="en-GB" noProof="0" smtClean="0"/>
               <a:pPr/>
-              <a:t>14</a:t>
+              <a:t>16</a:t>
             </a:fld>
             <a:r>
               <a:rPr lang="en-GB" noProof="0" dirty="0"/>
@@ -10383,7 +10924,7 @@
 </p:sld>
 </file>
 
-<file path=ppt/slides/slide15.xml><?xml version="1.0" encoding="utf-8"?>
+<file path=ppt/slides/slide17.xml><?xml version="1.0" encoding="utf-8"?>
 <p:sld xmlns:a="http://schemas.openxmlformats.org/drawingml/2006/main" xmlns:r="http://schemas.openxmlformats.org/officeDocument/2006/relationships" xmlns:p="http://schemas.openxmlformats.org/presentationml/2006/main">
   <p:cSld>
     <p:spTree>
@@ -10511,7 +11052,7 @@
             <a:fld id="{6C8FC03C-C266-4645-ABC5-645062898383}" type="slidenum">
               <a:rPr lang="en-GB" noProof="0" smtClean="0"/>
               <a:pPr algn="ctr"/>
-              <a:t>15</a:t>
+              <a:t>17</a:t>
             </a:fld>
             <a:r>
               <a:rPr lang="en-GB" noProof="0" dirty="0"/>
@@ -10533,7 +11074,7 @@
 </p:sld>
 </file>
 
-<file path=ppt/slides/slide16.xml><?xml version="1.0" encoding="utf-8"?>
+<file path=ppt/slides/slide18.xml><?xml version="1.0" encoding="utf-8"?>
 <p:sld xmlns:a="http://schemas.openxmlformats.org/drawingml/2006/main" xmlns:r="http://schemas.openxmlformats.org/officeDocument/2006/relationships" xmlns:p="http://schemas.openxmlformats.org/presentationml/2006/main">
   <p:cSld>
     <p:spTree>
@@ -10684,7 +11225,7 @@
             <a:fld id="{6C8FC03C-C266-4645-ABC5-645062898383}" type="slidenum">
               <a:rPr lang="en-GB" noProof="0" smtClean="0"/>
               <a:pPr/>
-              <a:t>16</a:t>
+              <a:t>18</a:t>
             </a:fld>
             <a:r>
               <a:rPr lang="en-GB" noProof="0" dirty="0"/>
@@ -10706,7 +11247,7 @@
 </p:sld>
 </file>
 
-<file path=ppt/slides/slide17.xml><?xml version="1.0" encoding="utf-8"?>
+<file path=ppt/slides/slide19.xml><?xml version="1.0" encoding="utf-8"?>
 <p:sld xmlns:a="http://schemas.openxmlformats.org/drawingml/2006/main" xmlns:r="http://schemas.openxmlformats.org/officeDocument/2006/relationships" xmlns:p="http://schemas.openxmlformats.org/presentationml/2006/main">
   <p:cSld>
     <p:spTree>
@@ -10824,12 +11365,305 @@
               <a:buChar char=""/>
             </a:pPr>
             <a:r>
-              <a:rPr lang="en-US" sz="1800" i="1" spc="-1" dirty="0">
-                <a:solidFill>
-                  <a:schemeClr val="dk2"/>
-                </a:solidFill>
-              </a:rPr>
-              <a:t>text</a:t>
+              <a:rPr lang="de-DE" i="1" dirty="0"/>
+              <a:t>S. G. Patil, T. Zhang, X. Wang and J. E. Gonzalez. Gorilla: Large </a:t>
+            </a:r>
+            <a:r>
+              <a:rPr lang="de-DE" i="1" dirty="0" err="1"/>
+              <a:t>language</a:t>
+            </a:r>
+            <a:r>
+              <a:rPr lang="de-DE" i="1" dirty="0"/>
+              <a:t> </a:t>
+            </a:r>
+            <a:r>
+              <a:rPr lang="de-DE" i="1" dirty="0" err="1"/>
+              <a:t>model</a:t>
+            </a:r>
+            <a:r>
+              <a:rPr lang="de-DE" i="1" dirty="0"/>
+              <a:t> </a:t>
+            </a:r>
+            <a:r>
+              <a:rPr lang="de-DE" i="1" dirty="0" err="1"/>
+              <a:t>connected</a:t>
+            </a:r>
+            <a:r>
+              <a:rPr lang="de-DE" i="1" dirty="0"/>
+              <a:t> </a:t>
+            </a:r>
+            <a:r>
+              <a:rPr lang="de-DE" i="1" dirty="0" err="1"/>
+              <a:t>with</a:t>
+            </a:r>
+            <a:r>
+              <a:rPr lang="de-DE" i="1" dirty="0"/>
+              <a:t> massive APIs. arXiv:2305.15334, 2023. https://github.com/ </a:t>
+            </a:r>
+            <a:r>
+              <a:rPr lang="de-DE" i="1" dirty="0" err="1"/>
+              <a:t>ShishirPatil</a:t>
+            </a:r>
+            <a:r>
+              <a:rPr lang="de-DE" i="1" dirty="0"/>
+              <a:t>/</a:t>
+            </a:r>
+            <a:r>
+              <a:rPr lang="de-DE" i="1" dirty="0" err="1"/>
+              <a:t>gorilla</a:t>
+            </a:r>
+            <a:endParaRPr lang="de-DE" i="1" dirty="0"/>
+          </a:p>
+          <a:p>
+            <a:pPr lvl="2">
+              <a:lnSpc>
+                <a:spcPct val="100000"/>
+              </a:lnSpc>
+              <a:spcAft>
+                <a:spcPts val="601"/>
+              </a:spcAft>
+              <a:buClr>
+                <a:srgbClr val="003560"/>
+              </a:buClr>
+              <a:buSzPct val="130000"/>
+              <a:buFont typeface="Wingdings" charset="2"/>
+              <a:buChar char=""/>
+            </a:pPr>
+            <a:r>
+              <a:rPr lang="de-DE" i="1" dirty="0"/>
+              <a:t>S. Yao, N. Shinn, P. Razavi and K. Narasimhan. τ -</a:t>
+            </a:r>
+            <a:r>
+              <a:rPr lang="de-DE" i="1" dirty="0" err="1"/>
+              <a:t>bench</a:t>
+            </a:r>
+            <a:r>
+              <a:rPr lang="de-DE" i="1" dirty="0"/>
+              <a:t>: A benchmark </a:t>
+            </a:r>
+            <a:r>
+              <a:rPr lang="de-DE" i="1" dirty="0" err="1"/>
+              <a:t>for</a:t>
+            </a:r>
+            <a:r>
+              <a:rPr lang="de-DE" i="1" dirty="0"/>
+              <a:t> tool-agent- </a:t>
+            </a:r>
+            <a:r>
+              <a:rPr lang="de-DE" i="1" dirty="0" err="1"/>
+              <a:t>user</a:t>
+            </a:r>
+            <a:r>
+              <a:rPr lang="de-DE" i="1" dirty="0"/>
+              <a:t> </a:t>
+            </a:r>
+            <a:r>
+              <a:rPr lang="de-DE" i="1" dirty="0" err="1"/>
+              <a:t>interaction</a:t>
+            </a:r>
+            <a:r>
+              <a:rPr lang="de-DE" i="1" dirty="0"/>
+              <a:t> in real-</a:t>
+            </a:r>
+            <a:r>
+              <a:rPr lang="de-DE" i="1" dirty="0" err="1"/>
+              <a:t>world</a:t>
+            </a:r>
+            <a:r>
+              <a:rPr lang="de-DE" i="1" dirty="0"/>
+              <a:t> </a:t>
+            </a:r>
+            <a:r>
+              <a:rPr lang="de-DE" i="1" dirty="0" err="1"/>
+              <a:t>domains</a:t>
+            </a:r>
+            <a:r>
+              <a:rPr lang="de-DE" i="1" dirty="0"/>
+              <a:t>. arXiv:2406.12045, 2024.</a:t>
+            </a:r>
+          </a:p>
+          <a:p>
+            <a:pPr lvl="2">
+              <a:lnSpc>
+                <a:spcPct val="100000"/>
+              </a:lnSpc>
+              <a:spcAft>
+                <a:spcPts val="601"/>
+              </a:spcAft>
+              <a:buClr>
+                <a:srgbClr val="003560"/>
+              </a:buClr>
+              <a:buSzPct val="130000"/>
+              <a:buFont typeface="Wingdings" charset="2"/>
+              <a:buChar char=""/>
+            </a:pPr>
+            <a:r>
+              <a:rPr lang="de-DE" i="1" dirty="0"/>
+              <a:t>S. </a:t>
+            </a:r>
+            <a:r>
+              <a:rPr lang="de-DE" i="1" dirty="0" err="1"/>
+              <a:t>Rabanser</a:t>
+            </a:r>
+            <a:r>
+              <a:rPr lang="de-DE" i="1" dirty="0"/>
+              <a:t>, S. Kapoor, P. Kirgis, K. Liu, S. Utpala and A. Narayanan. </a:t>
+            </a:r>
+            <a:r>
+              <a:rPr lang="de-DE" i="1" dirty="0" err="1"/>
+              <a:t>Towards</a:t>
+            </a:r>
+            <a:r>
+              <a:rPr lang="de-DE" i="1" dirty="0"/>
+              <a:t> a </a:t>
+            </a:r>
+            <a:r>
+              <a:rPr lang="de-DE" i="1" dirty="0" err="1"/>
+              <a:t>science</a:t>
+            </a:r>
+            <a:r>
+              <a:rPr lang="de-DE" i="1" dirty="0"/>
+              <a:t> </a:t>
+            </a:r>
+            <a:r>
+              <a:rPr lang="de-DE" i="1" dirty="0" err="1"/>
+              <a:t>of</a:t>
+            </a:r>
+            <a:r>
+              <a:rPr lang="de-DE" i="1" dirty="0"/>
+              <a:t> AI </a:t>
+            </a:r>
+            <a:r>
+              <a:rPr lang="de-DE" i="1" dirty="0" err="1"/>
+              <a:t>agent</a:t>
+            </a:r>
+            <a:r>
+              <a:rPr lang="de-DE" i="1" dirty="0"/>
+              <a:t> </a:t>
+            </a:r>
+            <a:r>
+              <a:rPr lang="de-DE" i="1" dirty="0" err="1"/>
+              <a:t>reliability</a:t>
+            </a:r>
+            <a:r>
+              <a:rPr lang="de-DE" i="1" dirty="0"/>
+              <a:t>. arXiv:2602.16666, 2026.</a:t>
+            </a:r>
+          </a:p>
+          <a:p>
+            <a:pPr lvl="2">
+              <a:lnSpc>
+                <a:spcPct val="100000"/>
+              </a:lnSpc>
+              <a:spcAft>
+                <a:spcPts val="601"/>
+              </a:spcAft>
+              <a:buClr>
+                <a:srgbClr val="003560"/>
+              </a:buClr>
+              <a:buSzPct val="130000"/>
+              <a:buFont typeface="Wingdings" charset="2"/>
+              <a:buChar char=""/>
+            </a:pPr>
+            <a:r>
+              <a:rPr lang="de-DE" i="1" dirty="0"/>
+              <a:t>K. Greshake, S. Abdelnabi, S. Mishra, C. Endres, T. Holz and M. Fritz. Not </a:t>
+            </a:r>
+            <a:r>
+              <a:rPr lang="de-DE" i="1" dirty="0" err="1"/>
+              <a:t>what</a:t>
+            </a:r>
+            <a:r>
+              <a:rPr lang="de-DE" i="1" dirty="0"/>
+              <a:t> </a:t>
+            </a:r>
+            <a:r>
+              <a:rPr lang="de-DE" i="1" dirty="0" err="1"/>
+              <a:t>you’ve</a:t>
+            </a:r>
+            <a:r>
+              <a:rPr lang="de-DE" i="1" dirty="0"/>
+              <a:t> </a:t>
+            </a:r>
+            <a:r>
+              <a:rPr lang="de-DE" i="1" dirty="0" err="1"/>
+              <a:t>signed</a:t>
+            </a:r>
+            <a:r>
+              <a:rPr lang="de-DE" i="1" dirty="0"/>
+              <a:t> </a:t>
+            </a:r>
+            <a:r>
+              <a:rPr lang="de-DE" i="1" dirty="0" err="1"/>
+              <a:t>up</a:t>
+            </a:r>
+            <a:r>
+              <a:rPr lang="de-DE" i="1" dirty="0"/>
+              <a:t> </a:t>
+            </a:r>
+            <a:r>
+              <a:rPr lang="de-DE" i="1" dirty="0" err="1"/>
+              <a:t>for</a:t>
+            </a:r>
+            <a:r>
+              <a:rPr lang="de-DE" i="1" dirty="0"/>
+              <a:t>: </a:t>
+            </a:r>
+            <a:r>
+              <a:rPr lang="de-DE" i="1" dirty="0" err="1"/>
+              <a:t>Compromising</a:t>
+            </a:r>
+            <a:r>
+              <a:rPr lang="de-DE" i="1" dirty="0"/>
+              <a:t> real-</a:t>
+            </a:r>
+            <a:r>
+              <a:rPr lang="de-DE" i="1" dirty="0" err="1"/>
+              <a:t>world</a:t>
+            </a:r>
+            <a:r>
+              <a:rPr lang="de-DE" i="1" dirty="0"/>
+              <a:t> LLM-</a:t>
+            </a:r>
+            <a:r>
+              <a:rPr lang="de-DE" i="1" dirty="0" err="1"/>
+              <a:t>integrated</a:t>
+            </a:r>
+            <a:r>
+              <a:rPr lang="de-DE" i="1" dirty="0"/>
+              <a:t> </a:t>
+            </a:r>
+            <a:r>
+              <a:rPr lang="de-DE" i="1" dirty="0" err="1"/>
+              <a:t>applications</a:t>
+            </a:r>
+            <a:r>
+              <a:rPr lang="de-DE" i="1" dirty="0"/>
+              <a:t> </a:t>
+            </a:r>
+            <a:r>
+              <a:rPr lang="de-DE" i="1" dirty="0" err="1"/>
+              <a:t>with</a:t>
+            </a:r>
+            <a:r>
+              <a:rPr lang="de-DE" i="1" dirty="0"/>
+              <a:t> </a:t>
+            </a:r>
+            <a:r>
+              <a:rPr lang="de-DE" i="1" dirty="0" err="1"/>
+              <a:t>indirect</a:t>
+            </a:r>
+            <a:r>
+              <a:rPr lang="de-DE" i="1" dirty="0"/>
+              <a:t> prompt </a:t>
+            </a:r>
+            <a:r>
+              <a:rPr lang="de-DE" i="1" dirty="0" err="1"/>
+              <a:t>injection</a:t>
+            </a:r>
+            <a:r>
+              <a:rPr lang="de-DE" i="1" dirty="0"/>
+              <a:t>. arXiv:2302.12173, 2023.</a:t>
             </a:r>
             <a:endParaRPr lang="en-GB" sz="1800" i="1" spc="-1" noProof="0" dirty="0">
               <a:solidFill>
@@ -10863,7 +11697,7 @@
             <a:fld id="{6C8FC03C-C266-4645-ABC5-645062898383}" type="slidenum">
               <a:rPr lang="en-GB" noProof="0" smtClean="0"/>
               <a:pPr/>
-              <a:t>17</a:t>
+              <a:t>19</a:t>
             </a:fld>
             <a:r>
               <a:rPr lang="en-GB" noProof="0" dirty="0"/>
@@ -10876,106 +11710,6 @@
     <p:extLst>
       <p:ext uri="{BB962C8B-B14F-4D97-AF65-F5344CB8AC3E}">
         <p14:creationId xmlns:p14="http://schemas.microsoft.com/office/powerpoint/2010/main" val="3272688662"/>
-      </p:ext>
-    </p:extLst>
-  </p:cSld>
-  <p:clrMapOvr>
-    <a:masterClrMapping/>
-  </p:clrMapOvr>
-</p:sld>
-</file>
-
-<file path=ppt/slides/slide18.xml><?xml version="1.0" encoding="utf-8"?>
-<p:sld xmlns:a="http://schemas.openxmlformats.org/drawingml/2006/main" xmlns:r="http://schemas.openxmlformats.org/officeDocument/2006/relationships" xmlns:p="http://schemas.openxmlformats.org/presentationml/2006/main">
-  <p:cSld>
-    <p:spTree>
-      <p:nvGrpSpPr>
-        <p:cNvPr id="1" name=""/>
-        <p:cNvGrpSpPr/>
-        <p:nvPr/>
-      </p:nvGrpSpPr>
-      <p:grpSpPr>
-        <a:xfrm>
-          <a:off x="0" y="0"/>
-          <a:ext cx="0" cy="0"/>
-          <a:chOff x="0" y="0"/>
-          <a:chExt cx="0" cy="0"/>
-        </a:xfrm>
-      </p:grpSpPr>
-      <p:pic>
-        <p:nvPicPr>
-          <p:cNvPr id="4" name="Grafik 3" descr="Logo der RUB">
-            <a:extLst>
-              <a:ext uri="{FF2B5EF4-FFF2-40B4-BE49-F238E27FC236}">
-                <a16:creationId xmlns:a16="http://schemas.microsoft.com/office/drawing/2014/main" id="{80003CB7-2083-C803-7547-BDE78423C040}"/>
-              </a:ext>
-            </a:extLst>
-          </p:cNvPr>
-          <p:cNvPicPr>
-            <a:picLocks noChangeAspect="1"/>
-          </p:cNvPicPr>
-          <p:nvPr/>
-        </p:nvPicPr>
-        <p:blipFill>
-          <a:blip r:embed="rId3">
-            <a:extLst>
-              <a:ext uri="{28A0092B-C50C-407E-A947-70E740481C1C}">
-                <a14:useLocalDpi xmlns:a14="http://schemas.microsoft.com/office/drawing/2010/main"/>
-              </a:ext>
-            </a:extLst>
-          </a:blip>
-          <a:stretch>
-            <a:fillRect/>
-          </a:stretch>
-        </p:blipFill>
-        <p:spPr>
-          <a:xfrm>
-            <a:off x="2771347" y="2090831"/>
-            <a:ext cx="3601305" cy="961839"/>
-          </a:xfrm>
-          <a:prstGeom prst="rect">
-            <a:avLst/>
-          </a:prstGeom>
-        </p:spPr>
-      </p:pic>
-      <p:sp>
-        <p:nvSpPr>
-          <p:cNvPr id="3" name="Titel 2" hidden="1">
-            <a:extLst>
-              <a:ext uri="{FF2B5EF4-FFF2-40B4-BE49-F238E27FC236}">
-                <a16:creationId xmlns:a16="http://schemas.microsoft.com/office/drawing/2014/main" id="{37C5D7C1-9B04-BE56-E202-2703CC179349}"/>
-              </a:ext>
-            </a:extLst>
-          </p:cNvPr>
-          <p:cNvSpPr>
-            <a:spLocks noGrp="1"/>
-          </p:cNvSpPr>
-          <p:nvPr>
-            <p:ph type="title"/>
-          </p:nvPr>
-        </p:nvSpPr>
-        <p:spPr>
-          <a:xfrm>
-            <a:off x="485999" y="-956642"/>
-            <a:ext cx="8172000" cy="720000"/>
-          </a:xfrm>
-        </p:spPr>
-        <p:txBody>
-          <a:bodyPr/>
-          <a:lstStyle/>
-          <a:p>
-            <a:r>
-              <a:rPr lang="en-GB" noProof="0" dirty="0" err="1"/>
-              <a:t>Endfolie</a:t>
-            </a:r>
-            <a:endParaRPr lang="en-GB" noProof="0" dirty="0"/>
-          </a:p>
-        </p:txBody>
-      </p:sp>
-    </p:spTree>
-    <p:extLst>
-      <p:ext uri="{BB962C8B-B14F-4D97-AF65-F5344CB8AC3E}">
-        <p14:creationId xmlns:p14="http://schemas.microsoft.com/office/powerpoint/2010/main" val="2873428927"/>
       </p:ext>
     </p:extLst>
   </p:cSld>
@@ -11266,6 +12000,106 @@
     <p:extLst>
       <p:ext uri="{BB962C8B-B14F-4D97-AF65-F5344CB8AC3E}">
         <p14:creationId xmlns:p14="http://schemas.microsoft.com/office/powerpoint/2010/main" val="1110571716"/>
+      </p:ext>
+    </p:extLst>
+  </p:cSld>
+  <p:clrMapOvr>
+    <a:masterClrMapping/>
+  </p:clrMapOvr>
+</p:sld>
+</file>
+
+<file path=ppt/slides/slide20.xml><?xml version="1.0" encoding="utf-8"?>
+<p:sld xmlns:a="http://schemas.openxmlformats.org/drawingml/2006/main" xmlns:r="http://schemas.openxmlformats.org/officeDocument/2006/relationships" xmlns:p="http://schemas.openxmlformats.org/presentationml/2006/main">
+  <p:cSld>
+    <p:spTree>
+      <p:nvGrpSpPr>
+        <p:cNvPr id="1" name=""/>
+        <p:cNvGrpSpPr/>
+        <p:nvPr/>
+      </p:nvGrpSpPr>
+      <p:grpSpPr>
+        <a:xfrm>
+          <a:off x="0" y="0"/>
+          <a:ext cx="0" cy="0"/>
+          <a:chOff x="0" y="0"/>
+          <a:chExt cx="0" cy="0"/>
+        </a:xfrm>
+      </p:grpSpPr>
+      <p:pic>
+        <p:nvPicPr>
+          <p:cNvPr id="4" name="Grafik 3" descr="Logo der RUB">
+            <a:extLst>
+              <a:ext uri="{FF2B5EF4-FFF2-40B4-BE49-F238E27FC236}">
+                <a16:creationId xmlns:a16="http://schemas.microsoft.com/office/drawing/2014/main" id="{80003CB7-2083-C803-7547-BDE78423C040}"/>
+              </a:ext>
+            </a:extLst>
+          </p:cNvPr>
+          <p:cNvPicPr>
+            <a:picLocks noChangeAspect="1"/>
+          </p:cNvPicPr>
+          <p:nvPr/>
+        </p:nvPicPr>
+        <p:blipFill>
+          <a:blip r:embed="rId3">
+            <a:extLst>
+              <a:ext uri="{28A0092B-C50C-407E-A947-70E740481C1C}">
+                <a14:useLocalDpi xmlns:a14="http://schemas.microsoft.com/office/drawing/2010/main"/>
+              </a:ext>
+            </a:extLst>
+          </a:blip>
+          <a:stretch>
+            <a:fillRect/>
+          </a:stretch>
+        </p:blipFill>
+        <p:spPr>
+          <a:xfrm>
+            <a:off x="2771347" y="2090831"/>
+            <a:ext cx="3601305" cy="961839"/>
+          </a:xfrm>
+          <a:prstGeom prst="rect">
+            <a:avLst/>
+          </a:prstGeom>
+        </p:spPr>
+      </p:pic>
+      <p:sp>
+        <p:nvSpPr>
+          <p:cNvPr id="3" name="Titel 2" hidden="1">
+            <a:extLst>
+              <a:ext uri="{FF2B5EF4-FFF2-40B4-BE49-F238E27FC236}">
+                <a16:creationId xmlns:a16="http://schemas.microsoft.com/office/drawing/2014/main" id="{37C5D7C1-9B04-BE56-E202-2703CC179349}"/>
+              </a:ext>
+            </a:extLst>
+          </p:cNvPr>
+          <p:cNvSpPr>
+            <a:spLocks noGrp="1"/>
+          </p:cNvSpPr>
+          <p:nvPr>
+            <p:ph type="title"/>
+          </p:nvPr>
+        </p:nvSpPr>
+        <p:spPr>
+          <a:xfrm>
+            <a:off x="485999" y="-956642"/>
+            <a:ext cx="8172000" cy="720000"/>
+          </a:xfrm>
+        </p:spPr>
+        <p:txBody>
+          <a:bodyPr/>
+          <a:lstStyle/>
+          <a:p>
+            <a:r>
+              <a:rPr lang="en-GB" noProof="0" dirty="0" err="1"/>
+              <a:t>Endfolie</a:t>
+            </a:r>
+            <a:endParaRPr lang="en-GB" noProof="0" dirty="0"/>
+          </a:p>
+        </p:txBody>
+      </p:sp>
+    </p:spTree>
+    <p:extLst>
+      <p:ext uri="{BB962C8B-B14F-4D97-AF65-F5344CB8AC3E}">
+        <p14:creationId xmlns:p14="http://schemas.microsoft.com/office/powerpoint/2010/main" val="2873428927"/>
       </p:ext>
     </p:extLst>
   </p:cSld>
@@ -11512,7 +12346,7 @@
         <p:spPr>
           <a:xfrm>
             <a:off x="468000" y="915566"/>
-            <a:ext cx="8424480" cy="3405888"/>
+            <a:ext cx="7920424" cy="3405888"/>
           </a:xfrm>
         </p:spPr>
         <p:txBody>
@@ -11534,13 +12368,173 @@
               <a:buChar char=""/>
             </a:pPr>
             <a:r>
-              <a:rPr lang="en-GB" sz="1800" spc="-1" noProof="0" dirty="0">
+              <a:rPr lang="en-US" sz="1800" spc="-1" dirty="0">
                 <a:solidFill>
                   <a:schemeClr val="dk2"/>
                 </a:solidFill>
               </a:rPr>
-              <a:t>text</a:t>
-            </a:r>
+              <a:t>LLM agents call tools and act, for example they book a trip.</a:t>
+            </a:r>
+          </a:p>
+          <a:p>
+            <a:pPr lvl="2">
+              <a:lnSpc>
+                <a:spcPct val="100000"/>
+              </a:lnSpc>
+              <a:spcAft>
+                <a:spcPts val="601"/>
+              </a:spcAft>
+              <a:buClr>
+                <a:srgbClr val="003560"/>
+              </a:buClr>
+              <a:buSzPct val="130000"/>
+              <a:buFont typeface="Wingdings" charset="2"/>
+              <a:buChar char=""/>
+            </a:pPr>
+            <a:r>
+              <a:rPr lang="en-US" sz="1800" spc="-1" dirty="0">
+                <a:solidFill>
+                  <a:schemeClr val="dk2"/>
+                </a:solidFill>
+              </a:rPr>
+              <a:t>A booking costs real money, so a wrong action is worse than a wrong answer.</a:t>
+            </a:r>
+          </a:p>
+          <a:p>
+            <a:pPr lvl="2">
+              <a:lnSpc>
+                <a:spcPct val="100000"/>
+              </a:lnSpc>
+              <a:spcAft>
+                <a:spcPts val="601"/>
+              </a:spcAft>
+              <a:buClr>
+                <a:srgbClr val="003560"/>
+              </a:buClr>
+              <a:buSzPct val="130000"/>
+              <a:buFont typeface="Wingdings" charset="2"/>
+              <a:buChar char=""/>
+            </a:pPr>
+            <a:r>
+              <a:rPr lang="en-US" sz="1800" spc="-1" dirty="0">
+                <a:solidFill>
+                  <a:schemeClr val="dk2"/>
+                </a:solidFill>
+              </a:rPr>
+              <a:t>A single score like "38% solved" does not show what happens in the failures.</a:t>
+            </a:r>
+          </a:p>
+          <a:p>
+            <a:pPr lvl="2">
+              <a:lnSpc>
+                <a:spcPct val="100000"/>
+              </a:lnSpc>
+              <a:spcAft>
+                <a:spcPts val="601"/>
+              </a:spcAft>
+              <a:buClr>
+                <a:srgbClr val="003560"/>
+              </a:buClr>
+              <a:buSzPct val="130000"/>
+              <a:buFont typeface="Wingdings" charset="2"/>
+              <a:buChar char=""/>
+            </a:pPr>
+            <a:endParaRPr lang="en-US" sz="1800" spc="-1" dirty="0">
+              <a:solidFill>
+                <a:schemeClr val="dk2"/>
+              </a:solidFill>
+            </a:endParaRPr>
+          </a:p>
+          <a:p>
+            <a:pPr lvl="2">
+              <a:lnSpc>
+                <a:spcPct val="100000"/>
+              </a:lnSpc>
+              <a:spcAft>
+                <a:spcPts val="601"/>
+              </a:spcAft>
+              <a:buClr>
+                <a:srgbClr val="003560"/>
+              </a:buClr>
+              <a:buSzPct val="130000"/>
+              <a:buFont typeface="Wingdings" charset="2"/>
+              <a:buChar char=""/>
+            </a:pPr>
+            <a:r>
+              <a:rPr lang="en-US" sz="1800" spc="-1" dirty="0">
+                <a:solidFill>
+                  <a:schemeClr val="dk2"/>
+                </a:solidFill>
+              </a:rPr>
+              <a:t>The question of this project is therefore:</a:t>
+            </a:r>
+            <a:br>
+              <a:rPr lang="en-US" sz="1800" spc="-1" dirty="0">
+                <a:solidFill>
+                  <a:schemeClr val="dk2"/>
+                </a:solidFill>
+              </a:rPr>
+            </a:br>
+            <a:r>
+              <a:rPr lang="de-DE" sz="1800" b="1" dirty="0"/>
+              <a:t>➜ </a:t>
+            </a:r>
+            <a:r>
+              <a:rPr lang="en-US" sz="1800" b="1" spc="-1" dirty="0">
+                <a:solidFill>
+                  <a:schemeClr val="dk2"/>
+                </a:solidFill>
+              </a:rPr>
+              <a:t>Is there more to agents than accuracy?</a:t>
+            </a:r>
+          </a:p>
+          <a:p>
+            <a:pPr lvl="2">
+              <a:lnSpc>
+                <a:spcPct val="100000"/>
+              </a:lnSpc>
+              <a:spcAft>
+                <a:spcPts val="601"/>
+              </a:spcAft>
+              <a:buClr>
+                <a:srgbClr val="003560"/>
+              </a:buClr>
+              <a:buSzPct val="130000"/>
+              <a:buFont typeface="Wingdings" charset="2"/>
+              <a:buChar char=""/>
+            </a:pPr>
+            <a:r>
+              <a:rPr lang="en-US" sz="1800" b="1" spc="-1" dirty="0">
+                <a:solidFill>
+                  <a:schemeClr val="dk2"/>
+                </a:solidFill>
+              </a:rPr>
+              <a:t>Setup:</a:t>
+            </a:r>
+            <a:br>
+              <a:rPr lang="en-US" sz="1800" spc="-1" dirty="0">
+                <a:solidFill>
+                  <a:schemeClr val="dk2"/>
+                </a:solidFill>
+              </a:rPr>
+            </a:br>
+            <a:r>
+              <a:rPr lang="de-DE" sz="1800" b="1" dirty="0"/>
+              <a:t>➜ </a:t>
+            </a:r>
+            <a:r>
+              <a:rPr lang="en-US" sz="1800" spc="-1" dirty="0">
+                <a:solidFill>
+                  <a:schemeClr val="dk2"/>
+                </a:solidFill>
+              </a:rPr>
+              <a:t>a travel booking task on a mock marketplace, where we always know the             	cheapest valid trip.</a:t>
+            </a:r>
+            <a:endParaRPr lang="en-GB" sz="1800" spc="-1" noProof="0" dirty="0">
+              <a:solidFill>
+                <a:schemeClr val="dk2"/>
+              </a:solidFill>
+            </a:endParaRPr>
           </a:p>
         </p:txBody>
       </p:sp>
@@ -11591,6 +12585,306 @@
 </file>
 
 <file path=ppt/slides/slide5.xml><?xml version="1.0" encoding="utf-8"?>
+<p:sld xmlns:a="http://schemas.openxmlformats.org/drawingml/2006/main" xmlns:r="http://schemas.openxmlformats.org/officeDocument/2006/relationships" xmlns:p="http://schemas.openxmlformats.org/presentationml/2006/main">
+  <p:cSld>
+    <p:spTree>
+      <p:nvGrpSpPr>
+        <p:cNvPr id="1" name="">
+          <a:extLst>
+            <a:ext uri="{FF2B5EF4-FFF2-40B4-BE49-F238E27FC236}">
+              <a16:creationId xmlns:a16="http://schemas.microsoft.com/office/drawing/2014/main" id="{AF58C9C4-2278-A57A-F178-BAB500B228E2}"/>
+            </a:ext>
+          </a:extLst>
+        </p:cNvPr>
+        <p:cNvGrpSpPr/>
+        <p:nvPr/>
+      </p:nvGrpSpPr>
+      <p:grpSpPr>
+        <a:xfrm>
+          <a:off x="0" y="0"/>
+          <a:ext cx="0" cy="0"/>
+          <a:chOff x="0" y="0"/>
+          <a:chExt cx="0" cy="0"/>
+        </a:xfrm>
+      </p:grpSpPr>
+      <p:sp>
+        <p:nvSpPr>
+          <p:cNvPr id="13" name="Titel">
+            <a:extLst>
+              <a:ext uri="{FF2B5EF4-FFF2-40B4-BE49-F238E27FC236}">
+                <a16:creationId xmlns:a16="http://schemas.microsoft.com/office/drawing/2014/main" id="{3BA0AF9D-4F5C-CD13-8C2C-8BB907AE4B21}"/>
+              </a:ext>
+            </a:extLst>
+          </p:cNvPr>
+          <p:cNvSpPr txBox="1">
+            <a:spLocks noGrp="1"/>
+          </p:cNvSpPr>
+          <p:nvPr>
+            <p:ph type="title"/>
+          </p:nvPr>
+        </p:nvSpPr>
+        <p:spPr>
+          <a:prstGeom prst="rect">
+            <a:avLst/>
+          </a:prstGeom>
+        </p:spPr>
+        <p:txBody>
+          <a:bodyPr vert="horz" lIns="0" tIns="0" rIns="0" bIns="0" rtlCol="0" anchor="t" anchorCtr="0">
+            <a:noAutofit/>
+          </a:bodyPr>
+          <a:lstStyle>
+            <a:lvl1pPr marL="0" indent="0" algn="l" defTabSz="685800" rtl="0" eaLnBrk="1" latinLnBrk="0" hangingPunct="1">
+              <a:lnSpc>
+                <a:spcPct val="100000"/>
+              </a:lnSpc>
+              <a:spcBef>
+                <a:spcPts val="0"/>
+              </a:spcBef>
+              <a:buFont typeface="Arial" panose="020B0604020202020204" pitchFamily="34" charset="0"/>
+              <a:buNone/>
+              <a:defRPr sz="2700" b="0" kern="1200" baseline="0">
+                <a:solidFill>
+                  <a:schemeClr val="tx2"/>
+                </a:solidFill>
+                <a:latin typeface="+mn-lt"/>
+                <a:ea typeface="+mj-ea"/>
+                <a:cs typeface="+mj-cs"/>
+              </a:defRPr>
+            </a:lvl1pPr>
+          </a:lstStyle>
+          <a:p>
+            <a:r>
+              <a:rPr lang="en-GB" sz="2800" b="1" dirty="0"/>
+              <a:t>Introduction</a:t>
+            </a:r>
+            <a:endParaRPr lang="en-GB" b="1" noProof="0" dirty="0"/>
+          </a:p>
+        </p:txBody>
+      </p:sp>
+      <p:sp>
+        <p:nvSpPr>
+          <p:cNvPr id="3" name="Folientext">
+            <a:extLst>
+              <a:ext uri="{FF2B5EF4-FFF2-40B4-BE49-F238E27FC236}">
+                <a16:creationId xmlns:a16="http://schemas.microsoft.com/office/drawing/2014/main" id="{B9840E28-1CD5-E118-385F-D0EFB203270A}"/>
+              </a:ext>
+            </a:extLst>
+          </p:cNvPr>
+          <p:cNvSpPr>
+            <a:spLocks noGrp="1"/>
+          </p:cNvSpPr>
+          <p:nvPr>
+            <p:ph idx="1"/>
+          </p:nvPr>
+        </p:nvSpPr>
+        <p:spPr>
+          <a:xfrm>
+            <a:off x="468000" y="915566"/>
+            <a:ext cx="8424480" cy="3405888"/>
+          </a:xfrm>
+        </p:spPr>
+        <p:txBody>
+          <a:bodyPr/>
+          <a:lstStyle/>
+          <a:p>
+            <a:pPr lvl="2">
+              <a:lnSpc>
+                <a:spcPct val="100000"/>
+              </a:lnSpc>
+              <a:spcAft>
+                <a:spcPts val="601"/>
+              </a:spcAft>
+              <a:buClr>
+                <a:srgbClr val="003560"/>
+              </a:buClr>
+              <a:buSzPct val="130000"/>
+              <a:buFont typeface="Wingdings" charset="2"/>
+              <a:buChar char=""/>
+            </a:pPr>
+            <a:r>
+              <a:rPr lang="en-US" sz="1800" spc="-1" dirty="0">
+                <a:solidFill>
+                  <a:schemeClr val="dk2"/>
+                </a:solidFill>
+              </a:rPr>
+              <a:t>The project was divided into two parts</a:t>
+            </a:r>
+          </a:p>
+          <a:p>
+            <a:pPr lvl="2">
+              <a:lnSpc>
+                <a:spcPct val="100000"/>
+              </a:lnSpc>
+              <a:spcAft>
+                <a:spcPts val="601"/>
+              </a:spcAft>
+              <a:buClr>
+                <a:srgbClr val="003560"/>
+              </a:buClr>
+              <a:buSzPct val="130000"/>
+              <a:buFont typeface="Wingdings" charset="2"/>
+              <a:buChar char=""/>
+            </a:pPr>
+            <a:r>
+              <a:rPr lang="en-US" sz="1800" b="1" spc="-1" dirty="0">
+                <a:solidFill>
+                  <a:schemeClr val="dk2"/>
+                </a:solidFill>
+              </a:rPr>
+              <a:t>Part I </a:t>
+            </a:r>
+            <a:r>
+              <a:rPr lang="en-US" sz="1800" spc="-1" dirty="0">
+                <a:solidFill>
+                  <a:schemeClr val="dk2"/>
+                </a:solidFill>
+              </a:rPr>
+              <a:t>measures accuracy, robustness, budget adherence, cost optimality and efficiency.</a:t>
+            </a:r>
+          </a:p>
+          <a:p>
+            <a:pPr lvl="2">
+              <a:lnSpc>
+                <a:spcPct val="100000"/>
+              </a:lnSpc>
+              <a:spcAft>
+                <a:spcPts val="601"/>
+              </a:spcAft>
+              <a:buClr>
+                <a:srgbClr val="003560"/>
+              </a:buClr>
+              <a:buSzPct val="130000"/>
+              <a:buFont typeface="Wingdings" charset="2"/>
+              <a:buChar char=""/>
+            </a:pPr>
+            <a:r>
+              <a:rPr lang="en-US" sz="1800" spc="-1" dirty="0">
+                <a:solidFill>
+                  <a:schemeClr val="dk2"/>
+                </a:solidFill>
+              </a:rPr>
+              <a:t>In </a:t>
+            </a:r>
+            <a:r>
+              <a:rPr lang="en-US" sz="1800" b="1" spc="-1" dirty="0">
+                <a:solidFill>
+                  <a:schemeClr val="dk2"/>
+                </a:solidFill>
+              </a:rPr>
+              <a:t>Part II </a:t>
+            </a:r>
+            <a:r>
+              <a:rPr lang="en-US" sz="1800" spc="-1" dirty="0">
+                <a:solidFill>
+                  <a:schemeClr val="dk2"/>
+                </a:solidFill>
+              </a:rPr>
+              <a:t>the environment turns hostile or changes during the task.</a:t>
+            </a:r>
+            <a:br>
+              <a:rPr lang="en-US" sz="1800" spc="-1" dirty="0">
+                <a:solidFill>
+                  <a:schemeClr val="dk2"/>
+                </a:solidFill>
+              </a:rPr>
+            </a:br>
+            <a:r>
+              <a:rPr lang="de-DE" sz="1800" b="1" dirty="0"/>
+              <a:t>➜ </a:t>
+            </a:r>
+            <a:r>
+              <a:rPr lang="en-US" sz="1800" spc="-1" dirty="0">
+                <a:solidFill>
+                  <a:schemeClr val="dk2"/>
+                </a:solidFill>
+              </a:rPr>
+              <a:t>Attacker instructions are hidden in tool outputs.</a:t>
+            </a:r>
+            <a:br>
+              <a:rPr lang="en-US" sz="1800" spc="-1" dirty="0">
+                <a:solidFill>
+                  <a:schemeClr val="dk2"/>
+                </a:solidFill>
+              </a:rPr>
+            </a:br>
+            <a:r>
+              <a:rPr lang="de-DE" sz="1800" b="1" dirty="0"/>
+              <a:t>➜ </a:t>
+            </a:r>
+            <a:r>
+              <a:rPr lang="en-US" sz="1800" dirty="0"/>
+              <a:t>Every task is repeated five times to see how stable the agent really is.</a:t>
+            </a:r>
+            <a:br>
+              <a:rPr lang="de-DE" sz="1800" dirty="0"/>
+            </a:br>
+            <a:r>
+              <a:rPr lang="de-DE" sz="1800" b="1" dirty="0"/>
+              <a:t>➜ </a:t>
+            </a:r>
+            <a:r>
+              <a:rPr lang="en-US" sz="1800" spc="-1" dirty="0">
+                <a:solidFill>
+                  <a:schemeClr val="dk2"/>
+                </a:solidFill>
+              </a:rPr>
+              <a:t>We cut the budget after the agent has already booked.</a:t>
+            </a:r>
+            <a:endParaRPr lang="en-GB" sz="1800" spc="-1" noProof="0" dirty="0">
+              <a:solidFill>
+                <a:schemeClr val="dk2"/>
+              </a:solidFill>
+            </a:endParaRPr>
+          </a:p>
+        </p:txBody>
+      </p:sp>
+      <p:sp>
+        <p:nvSpPr>
+          <p:cNvPr id="14" name="Foliennummer">
+            <a:extLst>
+              <a:ext uri="{FF2B5EF4-FFF2-40B4-BE49-F238E27FC236}">
+                <a16:creationId xmlns:a16="http://schemas.microsoft.com/office/drawing/2014/main" id="{FE158065-A9F4-171A-CAB7-88474392474C}"/>
+              </a:ext>
+            </a:extLst>
+          </p:cNvPr>
+          <p:cNvSpPr>
+            <a:spLocks noGrp="1"/>
+          </p:cNvSpPr>
+          <p:nvPr>
+            <p:ph type="sldNum" sz="quarter" idx="12"/>
+          </p:nvPr>
+        </p:nvSpPr>
+        <p:spPr/>
+        <p:txBody>
+          <a:bodyPr/>
+          <a:lstStyle/>
+          <a:p>
+            <a:fld id="{6C8FC03C-C266-4645-ABC5-645062898383}" type="slidenum">
+              <a:rPr lang="en-GB" noProof="0" smtClean="0"/>
+              <a:pPr/>
+              <a:t>5</a:t>
+            </a:fld>
+            <a:r>
+              <a:rPr lang="en-GB" noProof="0" dirty="0"/>
+              <a:t> </a:t>
+            </a:r>
+          </a:p>
+        </p:txBody>
+      </p:sp>
+    </p:spTree>
+    <p:extLst>
+      <p:ext uri="{BB962C8B-B14F-4D97-AF65-F5344CB8AC3E}">
+        <p14:creationId xmlns:p14="http://schemas.microsoft.com/office/powerpoint/2010/main" val="1720113035"/>
+      </p:ext>
+    </p:extLst>
+  </p:cSld>
+  <p:clrMapOvr>
+    <a:masterClrMapping/>
+  </p:clrMapOvr>
+</p:sld>
+</file>
+
+<file path=ppt/slides/slide6.xml><?xml version="1.0" encoding="utf-8"?>
 <p:sld xmlns:a="http://schemas.openxmlformats.org/drawingml/2006/main" xmlns:r="http://schemas.openxmlformats.org/officeDocument/2006/relationships" xmlns:p="http://schemas.openxmlformats.org/presentationml/2006/main">
   <p:cSld>
     <p:spTree>
@@ -11718,7 +13012,7 @@
             <a:fld id="{6C8FC03C-C266-4645-ABC5-645062898383}" type="slidenum">
               <a:rPr lang="en-GB" noProof="0" smtClean="0"/>
               <a:pPr algn="ctr"/>
-              <a:t>5</a:t>
+              <a:t>6</a:t>
             </a:fld>
             <a:r>
               <a:rPr lang="en-GB" noProof="0" dirty="0"/>
@@ -11740,7 +13034,7 @@
 </p:sld>
 </file>
 
-<file path=ppt/slides/slide6.xml><?xml version="1.0" encoding="utf-8"?>
+<file path=ppt/slides/slide7.xml><?xml version="1.0" encoding="utf-8"?>
 <p:sld xmlns:a="http://schemas.openxmlformats.org/drawingml/2006/main" xmlns:r="http://schemas.openxmlformats.org/officeDocument/2006/relationships" xmlns:p="http://schemas.openxmlformats.org/presentationml/2006/main">
   <p:cSld>
     <p:spTree>
@@ -11835,7 +13129,7 @@
         <p:spPr>
           <a:xfrm>
             <a:off x="468000" y="915566"/>
-            <a:ext cx="8424480" cy="3405888"/>
+            <a:ext cx="8568496" cy="3405888"/>
           </a:xfrm>
         </p:spPr>
         <p:txBody>
@@ -11857,13 +13151,481 @@
               <a:buChar char=""/>
             </a:pPr>
             <a:r>
-              <a:rPr lang="en-GB" sz="1800" spc="-1" noProof="0" dirty="0">
+              <a:rPr lang="en-US" sz="1800" spc="-1" dirty="0">
                 <a:solidFill>
                   <a:schemeClr val="dk2"/>
                 </a:solidFill>
               </a:rPr>
-              <a:t>text</a:t>
-            </a:r>
+              <a:t>Our project follows a line of work about LLM agents that call tools.</a:t>
+            </a:r>
+          </a:p>
+          <a:p>
+            <a:pPr lvl="2">
+              <a:lnSpc>
+                <a:spcPct val="100000"/>
+              </a:lnSpc>
+              <a:spcAft>
+                <a:spcPts val="601"/>
+              </a:spcAft>
+              <a:buClr>
+                <a:srgbClr val="003560"/>
+              </a:buClr>
+              <a:buSzPct val="130000"/>
+              <a:buFont typeface="Wingdings" charset="2"/>
+              <a:buChar char=""/>
+            </a:pPr>
+            <a:r>
+              <a:rPr lang="en-US" sz="1800" spc="-1" dirty="0">
+                <a:solidFill>
+                  <a:schemeClr val="dk2"/>
+                </a:solidFill>
+              </a:rPr>
+              <a:t>A requirement for an agent is that the model can write correct tool calls</a:t>
+            </a:r>
+            <a:br>
+              <a:rPr lang="en-US" sz="1800" spc="-1" dirty="0">
+                <a:solidFill>
+                  <a:schemeClr val="dk2"/>
+                </a:solidFill>
+              </a:rPr>
+            </a:br>
+            <a:r>
+              <a:rPr lang="de-DE" sz="1800" dirty="0"/>
+              <a:t>➜ </a:t>
+            </a:r>
+            <a:r>
+              <a:rPr lang="de-DE" sz="1800" b="1" dirty="0"/>
+              <a:t>Gorilla </a:t>
+            </a:r>
+            <a:r>
+              <a:rPr lang="de-DE" sz="1800" dirty="0" err="1"/>
+              <a:t>showed</a:t>
+            </a:r>
+            <a:r>
+              <a:rPr lang="de-DE" sz="1800" dirty="0"/>
+              <a:t> </a:t>
+            </a:r>
+            <a:r>
+              <a:rPr lang="de-DE" sz="1800" dirty="0" err="1"/>
+              <a:t>that</a:t>
+            </a:r>
+            <a:r>
+              <a:rPr lang="de-DE" sz="1800" dirty="0"/>
+              <a:t> </a:t>
+            </a:r>
+            <a:r>
+              <a:rPr lang="de-DE" sz="1800" dirty="0" err="1"/>
+              <a:t>this</a:t>
+            </a:r>
+            <a:r>
+              <a:rPr lang="de-DE" sz="1800" dirty="0"/>
+              <a:t> </a:t>
+            </a:r>
+            <a:r>
+              <a:rPr lang="de-DE" sz="1800" dirty="0" err="1"/>
+              <a:t>skill</a:t>
+            </a:r>
+            <a:r>
+              <a:rPr lang="de-DE" sz="1800" dirty="0"/>
+              <a:t> </a:t>
+            </a:r>
+            <a:r>
+              <a:rPr lang="de-DE" sz="1800" dirty="0" err="1"/>
+              <a:t>can</a:t>
+            </a:r>
+            <a:r>
+              <a:rPr lang="de-DE" sz="1800" dirty="0"/>
+              <a:t> </a:t>
+            </a:r>
+            <a:r>
+              <a:rPr lang="de-DE" sz="1800" dirty="0" err="1"/>
+              <a:t>be</a:t>
+            </a:r>
+            <a:r>
+              <a:rPr lang="de-DE" sz="1800" dirty="0"/>
+              <a:t> </a:t>
+            </a:r>
+            <a:r>
+              <a:rPr lang="de-DE" sz="1800" dirty="0" err="1"/>
+              <a:t>trained</a:t>
+            </a:r>
+            <a:r>
+              <a:rPr lang="de-DE" sz="1800" dirty="0"/>
+              <a:t> </a:t>
+            </a:r>
+            <a:r>
+              <a:rPr lang="de-DE" sz="1800" dirty="0" err="1"/>
+              <a:t>into</a:t>
+            </a:r>
+            <a:r>
+              <a:rPr lang="de-DE" sz="1800" dirty="0"/>
+              <a:t> a </a:t>
+            </a:r>
+            <a:r>
+              <a:rPr lang="de-DE" sz="1800" dirty="0" err="1"/>
+              <a:t>model</a:t>
+            </a:r>
+            <a:endParaRPr lang="de-DE" sz="1800" dirty="0"/>
+          </a:p>
+          <a:p>
+            <a:pPr lvl="2">
+              <a:lnSpc>
+                <a:spcPct val="100000"/>
+              </a:lnSpc>
+              <a:spcAft>
+                <a:spcPts val="601"/>
+              </a:spcAft>
+              <a:buClr>
+                <a:srgbClr val="003560"/>
+              </a:buClr>
+              <a:buSzPct val="130000"/>
+              <a:buFont typeface="Wingdings" charset="2"/>
+              <a:buChar char=""/>
+            </a:pPr>
+            <a:r>
+              <a:rPr lang="de-DE" sz="1800" b="1" dirty="0"/>
+              <a:t>Gorilla</a:t>
+            </a:r>
+            <a:r>
+              <a:rPr lang="de-DE" sz="1800" dirty="0"/>
+              <a:t> </a:t>
+            </a:r>
+            <a:r>
+              <a:rPr lang="de-DE" sz="1800" dirty="0" err="1"/>
+              <a:t>is</a:t>
+            </a:r>
+            <a:r>
+              <a:rPr lang="de-DE" sz="1800" dirty="0"/>
+              <a:t> a </a:t>
+            </a:r>
+            <a:r>
+              <a:rPr lang="de-DE" sz="1800" dirty="0" err="1"/>
+              <a:t>finetuned</a:t>
+            </a:r>
+            <a:r>
+              <a:rPr lang="de-DE" sz="1800" dirty="0"/>
+              <a:t> LLaMA </a:t>
+            </a:r>
+            <a:r>
+              <a:rPr lang="de-DE" sz="1800" dirty="0" err="1"/>
+              <a:t>model</a:t>
+            </a:r>
+            <a:r>
+              <a:rPr lang="de-DE" sz="1800" dirty="0"/>
+              <a:t> and </a:t>
+            </a:r>
+            <a:r>
+              <a:rPr lang="de-DE" sz="1800" dirty="0" err="1"/>
+              <a:t>writes</a:t>
+            </a:r>
+            <a:r>
+              <a:rPr lang="de-DE" sz="1800" dirty="0"/>
+              <a:t> </a:t>
+            </a:r>
+            <a:r>
+              <a:rPr lang="de-DE" sz="1800" dirty="0" err="1"/>
+              <a:t>correct</a:t>
+            </a:r>
+            <a:r>
+              <a:rPr lang="de-DE" sz="1800" dirty="0"/>
+              <a:t> </a:t>
+            </a:r>
+            <a:r>
+              <a:rPr lang="de-DE" sz="1800" dirty="0" err="1"/>
+              <a:t>calls</a:t>
+            </a:r>
+            <a:r>
+              <a:rPr lang="de-DE" sz="1800" dirty="0"/>
+              <a:t> </a:t>
+            </a:r>
+            <a:r>
+              <a:rPr lang="de-DE" sz="1800" dirty="0" err="1"/>
+              <a:t>to</a:t>
+            </a:r>
+            <a:r>
+              <a:rPr lang="de-DE" sz="1800" dirty="0"/>
+              <a:t> </a:t>
+            </a:r>
+            <a:r>
+              <a:rPr lang="de-DE" sz="1800" dirty="0" err="1"/>
+              <a:t>over</a:t>
+            </a:r>
+            <a:r>
+              <a:rPr lang="de-DE" sz="1800" dirty="0"/>
+              <a:t> 1600 real APIs</a:t>
+            </a:r>
+          </a:p>
+          <a:p>
+            <a:pPr lvl="2">
+              <a:lnSpc>
+                <a:spcPct val="100000"/>
+              </a:lnSpc>
+              <a:spcAft>
+                <a:spcPts val="601"/>
+              </a:spcAft>
+              <a:buClr>
+                <a:srgbClr val="003560"/>
+              </a:buClr>
+              <a:buSzPct val="130000"/>
+              <a:buFont typeface="Wingdings" charset="2"/>
+              <a:buChar char=""/>
+            </a:pPr>
+            <a:r>
+              <a:rPr lang="en-US" sz="1800" spc="-1" dirty="0">
+                <a:solidFill>
+                  <a:schemeClr val="dk2"/>
+                </a:solidFill>
+              </a:rPr>
+              <a:t>In our project one correct call is not enough</a:t>
+            </a:r>
+            <a:br>
+              <a:rPr lang="en-US" sz="1800" spc="-1" dirty="0">
+                <a:solidFill>
+                  <a:schemeClr val="dk2"/>
+                </a:solidFill>
+              </a:rPr>
+            </a:br>
+            <a:r>
+              <a:rPr lang="de-DE" sz="1800" dirty="0"/>
+              <a:t>➜ The </a:t>
+            </a:r>
+            <a:r>
+              <a:rPr lang="de-DE" sz="1800" dirty="0" err="1"/>
+              <a:t>agent</a:t>
+            </a:r>
+            <a:r>
+              <a:rPr lang="de-DE" sz="1800" dirty="0"/>
+              <a:t> </a:t>
+            </a:r>
+            <a:r>
+              <a:rPr lang="de-DE" sz="1800" dirty="0" err="1"/>
+              <a:t>has</a:t>
+            </a:r>
+            <a:r>
+              <a:rPr lang="de-DE" sz="1800" dirty="0"/>
+              <a:t> </a:t>
+            </a:r>
+            <a:r>
+              <a:rPr lang="de-DE" sz="1800" dirty="0" err="1"/>
+              <a:t>to</a:t>
+            </a:r>
+            <a:r>
+              <a:rPr lang="de-DE" sz="1800" dirty="0"/>
+              <a:t> </a:t>
+            </a:r>
+            <a:r>
+              <a:rPr lang="de-DE" sz="1800" dirty="0" err="1"/>
+              <a:t>make</a:t>
+            </a:r>
+            <a:r>
+              <a:rPr lang="de-DE" sz="1800" dirty="0"/>
+              <a:t> </a:t>
+            </a:r>
+            <a:r>
+              <a:rPr lang="de-DE" sz="1800" dirty="0" err="1"/>
+              <a:t>several</a:t>
+            </a:r>
+            <a:r>
+              <a:rPr lang="de-DE" sz="1800" dirty="0"/>
+              <a:t> </a:t>
+            </a:r>
+            <a:r>
+              <a:rPr lang="de-DE" sz="1800" dirty="0" err="1"/>
+              <a:t>calls</a:t>
+            </a:r>
+            <a:r>
+              <a:rPr lang="de-DE" sz="1800" dirty="0"/>
+              <a:t>, </a:t>
+            </a:r>
+            <a:r>
+              <a:rPr lang="de-DE" sz="1800" dirty="0" err="1"/>
+              <a:t>keep</a:t>
+            </a:r>
+            <a:r>
+              <a:rPr lang="de-DE" sz="1800" dirty="0"/>
+              <a:t> </a:t>
+            </a:r>
+            <a:r>
+              <a:rPr lang="de-DE" sz="1800" dirty="0" err="1"/>
+              <a:t>the</a:t>
+            </a:r>
+            <a:r>
+              <a:rPr lang="de-DE" sz="1800" dirty="0"/>
+              <a:t> total </a:t>
+            </a:r>
+            <a:r>
+              <a:rPr lang="de-DE" sz="1800" dirty="0" err="1"/>
+              <a:t>cost</a:t>
+            </a:r>
+            <a:r>
+              <a:rPr lang="de-DE" sz="1800" dirty="0"/>
+              <a:t> </a:t>
+            </a:r>
+            <a:r>
+              <a:rPr lang="de-DE" sz="1800" dirty="0" err="1"/>
+              <a:t>inside</a:t>
+            </a:r>
+            <a:r>
+              <a:rPr lang="de-DE" sz="1800" dirty="0"/>
+              <a:t> </a:t>
+            </a:r>
+            <a:r>
+              <a:rPr lang="de-DE" sz="1800" dirty="0" err="1"/>
+              <a:t>budget</a:t>
+            </a:r>
+            <a:r>
+              <a:rPr lang="de-DE" sz="1800" dirty="0"/>
+              <a:t> and </a:t>
+            </a:r>
+            <a:r>
+              <a:rPr lang="de-DE" sz="1800" dirty="0" err="1"/>
+              <a:t>decline</a:t>
+            </a:r>
+            <a:r>
+              <a:rPr lang="de-DE" sz="1800" dirty="0"/>
+              <a:t> </a:t>
+            </a:r>
+            <a:r>
+              <a:rPr lang="de-DE" sz="1800" dirty="0" err="1"/>
+              <a:t>when</a:t>
+            </a:r>
+            <a:r>
+              <a:rPr lang="de-DE" sz="1800" dirty="0"/>
+              <a:t> </a:t>
+            </a:r>
+            <a:r>
+              <a:rPr lang="de-DE" sz="1800" dirty="0" err="1"/>
+              <a:t>no</a:t>
+            </a:r>
+            <a:r>
+              <a:rPr lang="de-DE" sz="1800" dirty="0"/>
+              <a:t> </a:t>
+            </a:r>
+            <a:r>
+              <a:rPr lang="de-DE" sz="1800" dirty="0" err="1"/>
+              <a:t>trip</a:t>
+            </a:r>
+            <a:r>
+              <a:rPr lang="de-DE" sz="1800" dirty="0"/>
+              <a:t> </a:t>
+            </a:r>
+            <a:r>
+              <a:rPr lang="de-DE" sz="1800" dirty="0" err="1"/>
+              <a:t>fits</a:t>
+            </a:r>
+            <a:endParaRPr lang="en-US" sz="1800" spc="-1" dirty="0">
+              <a:solidFill>
+                <a:schemeClr val="dk2"/>
+              </a:solidFill>
+            </a:endParaRPr>
+          </a:p>
+          <a:p>
+            <a:pPr lvl="2">
+              <a:lnSpc>
+                <a:spcPct val="100000"/>
+              </a:lnSpc>
+              <a:spcAft>
+                <a:spcPts val="601"/>
+              </a:spcAft>
+              <a:buClr>
+                <a:srgbClr val="003560"/>
+              </a:buClr>
+              <a:buSzPct val="130000"/>
+              <a:buFont typeface="Wingdings" charset="2"/>
+              <a:buChar char=""/>
+            </a:pPr>
+            <a:r>
+              <a:rPr lang="en-US" sz="1800" b="1" spc="-1" dirty="0">
+                <a:solidFill>
+                  <a:schemeClr val="dk2"/>
+                </a:solidFill>
+              </a:rPr>
+              <a:t>τ-bench</a:t>
+            </a:r>
+            <a:r>
+              <a:rPr lang="en-US" sz="1800" spc="-1" dirty="0">
+                <a:solidFill>
+                  <a:schemeClr val="dk2"/>
+                </a:solidFill>
+              </a:rPr>
+              <a:t> (tau-bench): closest to our task</a:t>
+            </a:r>
+            <a:br>
+              <a:rPr lang="en-US" sz="1800" spc="-1" dirty="0">
+                <a:solidFill>
+                  <a:schemeClr val="dk2"/>
+                </a:solidFill>
+              </a:rPr>
+            </a:br>
+            <a:r>
+              <a:rPr lang="de-DE" sz="1800" dirty="0"/>
+              <a:t>➜ </a:t>
+            </a:r>
+            <a:r>
+              <a:rPr lang="de-DE" sz="1800" dirty="0" err="1"/>
+              <a:t>there</a:t>
+            </a:r>
+            <a:r>
+              <a:rPr lang="de-DE" sz="1800" dirty="0"/>
+              <a:t> an </a:t>
+            </a:r>
+            <a:r>
+              <a:rPr lang="de-DE" sz="1800" dirty="0" err="1"/>
+              <a:t>agent</a:t>
+            </a:r>
+            <a:r>
+              <a:rPr lang="de-DE" sz="1800" dirty="0"/>
+              <a:t> </a:t>
+            </a:r>
+            <a:r>
+              <a:rPr lang="de-DE" sz="1800" dirty="0" err="1"/>
+              <a:t>helps</a:t>
+            </a:r>
+            <a:r>
+              <a:rPr lang="de-DE" sz="1800" dirty="0"/>
+              <a:t> a </a:t>
+            </a:r>
+            <a:r>
+              <a:rPr lang="de-DE" sz="1800" dirty="0" err="1"/>
+              <a:t>simulated</a:t>
+            </a:r>
+            <a:r>
+              <a:rPr lang="de-DE" sz="1800" dirty="0"/>
+              <a:t> </a:t>
+            </a:r>
+            <a:r>
+              <a:rPr lang="de-DE" sz="1800" dirty="0" err="1"/>
+              <a:t>user</a:t>
+            </a:r>
+            <a:r>
+              <a:rPr lang="de-DE" sz="1800" dirty="0"/>
+              <a:t> in an </a:t>
+            </a:r>
+            <a:r>
+              <a:rPr lang="de-DE" sz="1800" dirty="0" err="1"/>
+              <a:t>airline</a:t>
+            </a:r>
+            <a:r>
+              <a:rPr lang="de-DE" sz="1800" dirty="0"/>
+              <a:t> and </a:t>
+            </a:r>
+            <a:r>
+              <a:rPr lang="de-DE" sz="1800" dirty="0" err="1"/>
+              <a:t>retail</a:t>
+            </a:r>
+            <a:r>
+              <a:rPr lang="de-DE" sz="1800" dirty="0"/>
+              <a:t> </a:t>
+            </a:r>
+            <a:r>
+              <a:rPr lang="de-DE" sz="1800" dirty="0" err="1"/>
+              <a:t>domain</a:t>
+            </a:r>
+            <a:endParaRPr lang="en-GB" sz="1800" spc="-1" noProof="0" dirty="0">
+              <a:solidFill>
+                <a:schemeClr val="dk2"/>
+              </a:solidFill>
+            </a:endParaRPr>
           </a:p>
         </p:txBody>
       </p:sp>
@@ -11891,7 +13653,7 @@
             <a:fld id="{6C8FC03C-C266-4645-ABC5-645062898383}" type="slidenum">
               <a:rPr lang="en-GB" noProof="0" smtClean="0"/>
               <a:pPr/>
-              <a:t>6</a:t>
+              <a:t>7</a:t>
             </a:fld>
             <a:r>
               <a:rPr lang="en-GB" noProof="0" dirty="0"/>
@@ -11913,7 +13675,402 @@
 </p:sld>
 </file>
 
-<file path=ppt/slides/slide7.xml><?xml version="1.0" encoding="utf-8"?>
+<file path=ppt/slides/slide8.xml><?xml version="1.0" encoding="utf-8"?>
+<p:sld xmlns:a="http://schemas.openxmlformats.org/drawingml/2006/main" xmlns:r="http://schemas.openxmlformats.org/officeDocument/2006/relationships" xmlns:p="http://schemas.openxmlformats.org/presentationml/2006/main">
+  <p:cSld>
+    <p:spTree>
+      <p:nvGrpSpPr>
+        <p:cNvPr id="1" name="">
+          <a:extLst>
+            <a:ext uri="{FF2B5EF4-FFF2-40B4-BE49-F238E27FC236}">
+              <a16:creationId xmlns:a16="http://schemas.microsoft.com/office/drawing/2014/main" id="{0F2B001B-C247-17DE-62FB-BAACE48A8400}"/>
+            </a:ext>
+          </a:extLst>
+        </p:cNvPr>
+        <p:cNvGrpSpPr/>
+        <p:nvPr/>
+      </p:nvGrpSpPr>
+      <p:grpSpPr>
+        <a:xfrm>
+          <a:off x="0" y="0"/>
+          <a:ext cx="0" cy="0"/>
+          <a:chOff x="0" y="0"/>
+          <a:chExt cx="0" cy="0"/>
+        </a:xfrm>
+      </p:grpSpPr>
+      <p:sp>
+        <p:nvSpPr>
+          <p:cNvPr id="13" name="Titel">
+            <a:extLst>
+              <a:ext uri="{FF2B5EF4-FFF2-40B4-BE49-F238E27FC236}">
+                <a16:creationId xmlns:a16="http://schemas.microsoft.com/office/drawing/2014/main" id="{A80ED1AA-14A9-7858-5F0F-3ED2497F8CCA}"/>
+              </a:ext>
+            </a:extLst>
+          </p:cNvPr>
+          <p:cNvSpPr txBox="1">
+            <a:spLocks noGrp="1"/>
+          </p:cNvSpPr>
+          <p:nvPr>
+            <p:ph type="title"/>
+          </p:nvPr>
+        </p:nvSpPr>
+        <p:spPr>
+          <a:prstGeom prst="rect">
+            <a:avLst/>
+          </a:prstGeom>
+        </p:spPr>
+        <p:txBody>
+          <a:bodyPr vert="horz" lIns="0" tIns="0" rIns="0" bIns="0" rtlCol="0" anchor="t" anchorCtr="0">
+            <a:noAutofit/>
+          </a:bodyPr>
+          <a:lstStyle>
+            <a:lvl1pPr marL="0" indent="0" algn="l" defTabSz="685800" rtl="0" eaLnBrk="1" latinLnBrk="0" hangingPunct="1">
+              <a:lnSpc>
+                <a:spcPct val="100000"/>
+              </a:lnSpc>
+              <a:spcBef>
+                <a:spcPts val="0"/>
+              </a:spcBef>
+              <a:buFont typeface="Arial" panose="020B0604020202020204" pitchFamily="34" charset="0"/>
+              <a:buNone/>
+              <a:defRPr sz="2700" b="0" kern="1200" baseline="0">
+                <a:solidFill>
+                  <a:schemeClr val="tx2"/>
+                </a:solidFill>
+                <a:latin typeface="+mn-lt"/>
+                <a:ea typeface="+mj-ea"/>
+                <a:cs typeface="+mj-cs"/>
+              </a:defRPr>
+            </a:lvl1pPr>
+          </a:lstStyle>
+          <a:p>
+            <a:r>
+              <a:rPr lang="en-GB" b="1" noProof="0" dirty="0"/>
+              <a:t>Related Work</a:t>
+            </a:r>
+          </a:p>
+        </p:txBody>
+      </p:sp>
+      <p:sp>
+        <p:nvSpPr>
+          <p:cNvPr id="3" name="Folientext">
+            <a:extLst>
+              <a:ext uri="{FF2B5EF4-FFF2-40B4-BE49-F238E27FC236}">
+                <a16:creationId xmlns:a16="http://schemas.microsoft.com/office/drawing/2014/main" id="{FB1124C7-AB0B-D611-89C4-DDFEBF7BF5E7}"/>
+              </a:ext>
+            </a:extLst>
+          </p:cNvPr>
+          <p:cNvSpPr>
+            <a:spLocks noGrp="1"/>
+          </p:cNvSpPr>
+          <p:nvPr>
+            <p:ph idx="1"/>
+          </p:nvPr>
+        </p:nvSpPr>
+        <p:spPr>
+          <a:xfrm>
+            <a:off x="468000" y="915566"/>
+            <a:ext cx="8208456" cy="3405888"/>
+          </a:xfrm>
+        </p:spPr>
+        <p:txBody>
+          <a:bodyPr/>
+          <a:lstStyle/>
+          <a:p>
+            <a:pPr lvl="2">
+              <a:lnSpc>
+                <a:spcPct val="100000"/>
+              </a:lnSpc>
+              <a:spcAft>
+                <a:spcPts val="601"/>
+              </a:spcAft>
+              <a:buClr>
+                <a:srgbClr val="003560"/>
+              </a:buClr>
+              <a:buSzPct val="130000"/>
+              <a:buFont typeface="Wingdings" charset="2"/>
+              <a:buChar char=""/>
+            </a:pPr>
+            <a:r>
+              <a:rPr lang="en-US" sz="1800" b="1" spc="-1" dirty="0" err="1">
+                <a:solidFill>
+                  <a:schemeClr val="dk2"/>
+                </a:solidFill>
+              </a:rPr>
+              <a:t>Rabanser</a:t>
+            </a:r>
+            <a:r>
+              <a:rPr lang="en-US" sz="1800" b="1" spc="-1" dirty="0">
+                <a:solidFill>
+                  <a:schemeClr val="dk2"/>
+                </a:solidFill>
+              </a:rPr>
+              <a:t> et al.: </a:t>
+            </a:r>
+            <a:r>
+              <a:rPr lang="en-US" sz="1800" spc="-1" dirty="0">
+                <a:solidFill>
+                  <a:schemeClr val="dk2"/>
+                </a:solidFill>
+              </a:rPr>
+              <a:t>one benchmark score does not show how dependable an agent is.</a:t>
+            </a:r>
+            <a:br>
+              <a:rPr lang="en-US" sz="1800" spc="-1" dirty="0">
+                <a:solidFill>
+                  <a:schemeClr val="dk2"/>
+                </a:solidFill>
+              </a:rPr>
+            </a:br>
+            <a:r>
+              <a:rPr lang="de-DE" b="1" dirty="0"/>
+              <a:t>➜ </a:t>
+            </a:r>
+            <a:r>
+              <a:rPr lang="en-US" sz="1800" spc="-1" dirty="0">
+                <a:solidFill>
+                  <a:schemeClr val="dk2"/>
+                </a:solidFill>
+              </a:rPr>
+              <a:t>So they use twelve metrics in four groups: </a:t>
+            </a:r>
+            <a:r>
+              <a:rPr lang="en-US" sz="1800" i="1" spc="-1" dirty="0">
+                <a:solidFill>
+                  <a:schemeClr val="dk2"/>
+                </a:solidFill>
+              </a:rPr>
+              <a:t>consistency, robustness, predictability and safety</a:t>
+            </a:r>
+            <a:r>
+              <a:rPr lang="en-US" sz="1800" spc="-1" dirty="0">
+                <a:solidFill>
+                  <a:schemeClr val="dk2"/>
+                </a:solidFill>
+              </a:rPr>
+              <a:t>.</a:t>
+            </a:r>
+          </a:p>
+          <a:p>
+            <a:pPr lvl="2">
+              <a:lnSpc>
+                <a:spcPct val="100000"/>
+              </a:lnSpc>
+              <a:spcAft>
+                <a:spcPts val="601"/>
+              </a:spcAft>
+              <a:buClr>
+                <a:srgbClr val="003560"/>
+              </a:buClr>
+              <a:buSzPct val="130000"/>
+              <a:buFont typeface="Wingdings" charset="2"/>
+              <a:buChar char=""/>
+            </a:pPr>
+            <a:r>
+              <a:rPr lang="en-US" sz="1800" spc="-1" dirty="0">
+                <a:solidFill>
+                  <a:schemeClr val="dk2"/>
+                </a:solidFill>
+              </a:rPr>
+              <a:t>Their finding: models got more capable, but not much more reliable. </a:t>
+            </a:r>
+            <a:br>
+              <a:rPr lang="en-US" sz="1800" spc="-1" dirty="0">
+                <a:solidFill>
+                  <a:schemeClr val="dk2"/>
+                </a:solidFill>
+              </a:rPr>
+            </a:br>
+            <a:r>
+              <a:rPr lang="de-DE" b="1" dirty="0"/>
+              <a:t>➜ </a:t>
+            </a:r>
+            <a:r>
+              <a:rPr lang="en-US" sz="1800" spc="-1" dirty="0">
+                <a:solidFill>
+                  <a:schemeClr val="dk2"/>
+                </a:solidFill>
+              </a:rPr>
+              <a:t>In our project we test the same groups.</a:t>
+            </a:r>
+          </a:p>
+          <a:p>
+            <a:pPr lvl="2">
+              <a:lnSpc>
+                <a:spcPct val="100000"/>
+              </a:lnSpc>
+              <a:spcAft>
+                <a:spcPts val="601"/>
+              </a:spcAft>
+              <a:buClr>
+                <a:srgbClr val="003560"/>
+              </a:buClr>
+              <a:buSzPct val="130000"/>
+              <a:buFont typeface="Wingdings" charset="2"/>
+              <a:buChar char=""/>
+            </a:pPr>
+            <a:r>
+              <a:rPr lang="en-US" sz="1800" spc="-1" dirty="0">
+                <a:solidFill>
+                  <a:schemeClr val="dk2"/>
+                </a:solidFill>
+              </a:rPr>
+              <a:t>Tool use also opens a door for attacks</a:t>
+            </a:r>
+          </a:p>
+          <a:p>
+            <a:pPr lvl="2">
+              <a:lnSpc>
+                <a:spcPct val="100000"/>
+              </a:lnSpc>
+              <a:spcAft>
+                <a:spcPts val="601"/>
+              </a:spcAft>
+              <a:buClr>
+                <a:srgbClr val="003560"/>
+              </a:buClr>
+              <a:buSzPct val="130000"/>
+              <a:buFont typeface="Wingdings" charset="2"/>
+              <a:buChar char=""/>
+            </a:pPr>
+            <a:r>
+              <a:rPr lang="en-US" sz="1800" b="1" spc="-1" dirty="0" err="1">
+                <a:solidFill>
+                  <a:schemeClr val="dk2"/>
+                </a:solidFill>
+              </a:rPr>
+              <a:t>Greshake</a:t>
+            </a:r>
+            <a:r>
+              <a:rPr lang="en-US" sz="1800" b="1" spc="-1" dirty="0">
+                <a:solidFill>
+                  <a:schemeClr val="dk2"/>
+                </a:solidFill>
+              </a:rPr>
+              <a:t> et al. </a:t>
+            </a:r>
+            <a:r>
+              <a:rPr lang="en-US" sz="1800" spc="-1" dirty="0">
+                <a:solidFill>
+                  <a:schemeClr val="dk2"/>
+                </a:solidFill>
+              </a:rPr>
+              <a:t>calls this indirect prompt injection</a:t>
+            </a:r>
+            <a:br>
+              <a:rPr lang="en-US" sz="1800" spc="-1" dirty="0">
+                <a:solidFill>
+                  <a:schemeClr val="dk2"/>
+                </a:solidFill>
+              </a:rPr>
+            </a:br>
+            <a:r>
+              <a:rPr lang="de-DE" b="1" dirty="0"/>
+              <a:t>➜ </a:t>
+            </a:r>
+            <a:r>
+              <a:rPr lang="en-US" sz="1800" spc="-1" dirty="0">
+                <a:solidFill>
+                  <a:schemeClr val="dk2"/>
+                </a:solidFill>
+              </a:rPr>
+              <a:t>Instructions hidden in content the model reads.</a:t>
+            </a:r>
+          </a:p>
+          <a:p>
+            <a:pPr lvl="2">
+              <a:lnSpc>
+                <a:spcPct val="100000"/>
+              </a:lnSpc>
+              <a:spcAft>
+                <a:spcPts val="601"/>
+              </a:spcAft>
+              <a:buClr>
+                <a:srgbClr val="003560"/>
+              </a:buClr>
+              <a:buSzPct val="130000"/>
+              <a:buFont typeface="Wingdings" charset="2"/>
+              <a:buChar char=""/>
+            </a:pPr>
+            <a:r>
+              <a:rPr lang="en-US" sz="1800" spc="-1" dirty="0">
+                <a:solidFill>
+                  <a:schemeClr val="dk2"/>
+                </a:solidFill>
+              </a:rPr>
+              <a:t>In Part 2 we treat the </a:t>
+            </a:r>
+            <a:r>
+              <a:rPr lang="en-US" sz="1800" spc="-1" dirty="0" err="1">
+                <a:solidFill>
+                  <a:schemeClr val="dk2"/>
+                </a:solidFill>
+              </a:rPr>
+              <a:t>the</a:t>
+            </a:r>
+            <a:r>
+              <a:rPr lang="en-US" sz="1800" spc="-1" dirty="0">
+                <a:solidFill>
+                  <a:schemeClr val="dk2"/>
+                </a:solidFill>
+              </a:rPr>
+              <a:t> marketplace as untrusted and hide instructions.</a:t>
+            </a:r>
+            <a:endParaRPr lang="en-GB" sz="1800" spc="-1" noProof="0" dirty="0">
+              <a:solidFill>
+                <a:schemeClr val="dk2"/>
+              </a:solidFill>
+            </a:endParaRPr>
+          </a:p>
+        </p:txBody>
+      </p:sp>
+      <p:sp>
+        <p:nvSpPr>
+          <p:cNvPr id="14" name="Foliennummer">
+            <a:extLst>
+              <a:ext uri="{FF2B5EF4-FFF2-40B4-BE49-F238E27FC236}">
+                <a16:creationId xmlns:a16="http://schemas.microsoft.com/office/drawing/2014/main" id="{6FB214E0-DC04-72D4-6952-EF39A6A45FEF}"/>
+              </a:ext>
+            </a:extLst>
+          </p:cNvPr>
+          <p:cNvSpPr>
+            <a:spLocks noGrp="1"/>
+          </p:cNvSpPr>
+          <p:nvPr>
+            <p:ph type="sldNum" sz="quarter" idx="12"/>
+          </p:nvPr>
+        </p:nvSpPr>
+        <p:spPr/>
+        <p:txBody>
+          <a:bodyPr/>
+          <a:lstStyle/>
+          <a:p>
+            <a:fld id="{6C8FC03C-C266-4645-ABC5-645062898383}" type="slidenum">
+              <a:rPr lang="en-GB" noProof="0" smtClean="0"/>
+              <a:pPr/>
+              <a:t>8</a:t>
+            </a:fld>
+            <a:r>
+              <a:rPr lang="en-GB" noProof="0" dirty="0"/>
+              <a:t> </a:t>
+            </a:r>
+          </a:p>
+        </p:txBody>
+      </p:sp>
+    </p:spTree>
+    <p:extLst>
+      <p:ext uri="{BB962C8B-B14F-4D97-AF65-F5344CB8AC3E}">
+        <p14:creationId xmlns:p14="http://schemas.microsoft.com/office/powerpoint/2010/main" val="2237252667"/>
+      </p:ext>
+    </p:extLst>
+  </p:cSld>
+  <p:clrMapOvr>
+    <a:masterClrMapping/>
+  </p:clrMapOvr>
+</p:sld>
+</file>
+
+<file path=ppt/slides/slide9.xml><?xml version="1.0" encoding="utf-8"?>
 <p:sld xmlns:a="http://schemas.openxmlformats.org/drawingml/2006/main" xmlns:r="http://schemas.openxmlformats.org/officeDocument/2006/relationships" xmlns:p="http://schemas.openxmlformats.org/presentationml/2006/main">
   <p:cSld>
     <p:spTree>
@@ -12041,7 +14198,7 @@
             <a:fld id="{6C8FC03C-C266-4645-ABC5-645062898383}" type="slidenum">
               <a:rPr lang="en-GB" noProof="0" smtClean="0"/>
               <a:pPr algn="ctr"/>
-              <a:t>7</a:t>
+              <a:t>9</a:t>
             </a:fld>
             <a:r>
               <a:rPr lang="en-GB" noProof="0" dirty="0"/>
@@ -12054,329 +14211,6 @@
     <p:extLst>
       <p:ext uri="{BB962C8B-B14F-4D97-AF65-F5344CB8AC3E}">
         <p14:creationId xmlns:p14="http://schemas.microsoft.com/office/powerpoint/2010/main" val="1783528109"/>
-      </p:ext>
-    </p:extLst>
-  </p:cSld>
-  <p:clrMapOvr>
-    <a:masterClrMapping/>
-  </p:clrMapOvr>
-</p:sld>
-</file>
-
-<file path=ppt/slides/slide8.xml><?xml version="1.0" encoding="utf-8"?>
-<p:sld xmlns:a="http://schemas.openxmlformats.org/drawingml/2006/main" xmlns:r="http://schemas.openxmlformats.org/officeDocument/2006/relationships" xmlns:p="http://schemas.openxmlformats.org/presentationml/2006/main">
-  <p:cSld>
-    <p:spTree>
-      <p:nvGrpSpPr>
-        <p:cNvPr id="1" name="">
-          <a:extLst>
-            <a:ext uri="{FF2B5EF4-FFF2-40B4-BE49-F238E27FC236}">
-              <a16:creationId xmlns:a16="http://schemas.microsoft.com/office/drawing/2014/main" id="{075BAF33-E329-F0AC-E12B-E83439358354}"/>
-            </a:ext>
-          </a:extLst>
-        </p:cNvPr>
-        <p:cNvGrpSpPr/>
-        <p:nvPr/>
-      </p:nvGrpSpPr>
-      <p:grpSpPr>
-        <a:xfrm>
-          <a:off x="0" y="0"/>
-          <a:ext cx="0" cy="0"/>
-          <a:chOff x="0" y="0"/>
-          <a:chExt cx="0" cy="0"/>
-        </a:xfrm>
-      </p:grpSpPr>
-      <p:sp>
-        <p:nvSpPr>
-          <p:cNvPr id="13" name="Titel">
-            <a:extLst>
-              <a:ext uri="{FF2B5EF4-FFF2-40B4-BE49-F238E27FC236}">
-                <a16:creationId xmlns:a16="http://schemas.microsoft.com/office/drawing/2014/main" id="{7CC364DB-CFDA-3538-DE36-A6FBE19B3D30}"/>
-              </a:ext>
-            </a:extLst>
-          </p:cNvPr>
-          <p:cNvSpPr txBox="1">
-            <a:spLocks noGrp="1"/>
-          </p:cNvSpPr>
-          <p:nvPr>
-            <p:ph type="title"/>
-          </p:nvPr>
-        </p:nvSpPr>
-        <p:spPr>
-          <a:prstGeom prst="rect">
-            <a:avLst/>
-          </a:prstGeom>
-        </p:spPr>
-        <p:txBody>
-          <a:bodyPr vert="horz" lIns="0" tIns="0" rIns="0" bIns="0" rtlCol="0" anchor="t" anchorCtr="0">
-            <a:noAutofit/>
-          </a:bodyPr>
-          <a:lstStyle>
-            <a:lvl1pPr marL="0" indent="0" algn="l" defTabSz="685800" rtl="0" eaLnBrk="1" latinLnBrk="0" hangingPunct="1">
-              <a:lnSpc>
-                <a:spcPct val="100000"/>
-              </a:lnSpc>
-              <a:spcBef>
-                <a:spcPts val="0"/>
-              </a:spcBef>
-              <a:buFont typeface="Arial" panose="020B0604020202020204" pitchFamily="34" charset="0"/>
-              <a:buNone/>
-              <a:defRPr sz="2700" b="0" kern="1200" baseline="0">
-                <a:solidFill>
-                  <a:schemeClr val="tx2"/>
-                </a:solidFill>
-                <a:latin typeface="+mn-lt"/>
-                <a:ea typeface="+mj-ea"/>
-                <a:cs typeface="+mj-cs"/>
-              </a:defRPr>
-            </a:lvl1pPr>
-          </a:lstStyle>
-          <a:p>
-            <a:r>
-              <a:rPr lang="en-GB" b="1" noProof="0" dirty="0"/>
-              <a:t>Approach</a:t>
-            </a:r>
-          </a:p>
-        </p:txBody>
-      </p:sp>
-      <p:sp>
-        <p:nvSpPr>
-          <p:cNvPr id="3" name="Folientext">
-            <a:extLst>
-              <a:ext uri="{FF2B5EF4-FFF2-40B4-BE49-F238E27FC236}">
-                <a16:creationId xmlns:a16="http://schemas.microsoft.com/office/drawing/2014/main" id="{373B75CC-77F2-6B4F-6225-2DD4F980C608}"/>
-              </a:ext>
-            </a:extLst>
-          </p:cNvPr>
-          <p:cNvSpPr>
-            <a:spLocks noGrp="1"/>
-          </p:cNvSpPr>
-          <p:nvPr>
-            <p:ph idx="1"/>
-          </p:nvPr>
-        </p:nvSpPr>
-        <p:spPr>
-          <a:xfrm>
-            <a:off x="468000" y="915566"/>
-            <a:ext cx="8424480" cy="3405888"/>
-          </a:xfrm>
-        </p:spPr>
-        <p:txBody>
-          <a:bodyPr/>
-          <a:lstStyle/>
-          <a:p>
-            <a:pPr lvl="2">
-              <a:lnSpc>
-                <a:spcPct val="100000"/>
-              </a:lnSpc>
-              <a:spcAft>
-                <a:spcPts val="601"/>
-              </a:spcAft>
-              <a:buClr>
-                <a:srgbClr val="003560"/>
-              </a:buClr>
-              <a:buSzPct val="130000"/>
-              <a:buFont typeface="Wingdings" charset="2"/>
-              <a:buChar char=""/>
-            </a:pPr>
-            <a:r>
-              <a:rPr lang="en-GB" sz="1800" spc="-1" noProof="0" dirty="0">
-                <a:solidFill>
-                  <a:schemeClr val="dk2"/>
-                </a:solidFill>
-              </a:rPr>
-              <a:t>text</a:t>
-            </a:r>
-          </a:p>
-        </p:txBody>
-      </p:sp>
-      <p:sp>
-        <p:nvSpPr>
-          <p:cNvPr id="14" name="Foliennummer">
-            <a:extLst>
-              <a:ext uri="{FF2B5EF4-FFF2-40B4-BE49-F238E27FC236}">
-                <a16:creationId xmlns:a16="http://schemas.microsoft.com/office/drawing/2014/main" id="{FC05A18E-4880-FB5A-7633-4A7B38CD3222}"/>
-              </a:ext>
-            </a:extLst>
-          </p:cNvPr>
-          <p:cNvSpPr>
-            <a:spLocks noGrp="1"/>
-          </p:cNvSpPr>
-          <p:nvPr>
-            <p:ph type="sldNum" sz="quarter" idx="12"/>
-          </p:nvPr>
-        </p:nvSpPr>
-        <p:spPr/>
-        <p:txBody>
-          <a:bodyPr/>
-          <a:lstStyle/>
-          <a:p>
-            <a:fld id="{6C8FC03C-C266-4645-ABC5-645062898383}" type="slidenum">
-              <a:rPr lang="en-GB" noProof="0" smtClean="0"/>
-              <a:pPr/>
-              <a:t>8</a:t>
-            </a:fld>
-            <a:r>
-              <a:rPr lang="en-GB" noProof="0" dirty="0"/>
-              <a:t> </a:t>
-            </a:r>
-          </a:p>
-        </p:txBody>
-      </p:sp>
-    </p:spTree>
-    <p:extLst>
-      <p:ext uri="{BB962C8B-B14F-4D97-AF65-F5344CB8AC3E}">
-        <p14:creationId xmlns:p14="http://schemas.microsoft.com/office/powerpoint/2010/main" val="261889466"/>
-      </p:ext>
-    </p:extLst>
-  </p:cSld>
-  <p:clrMapOvr>
-    <a:masterClrMapping/>
-  </p:clrMapOvr>
-</p:sld>
-</file>
-
-<file path=ppt/slides/slide9.xml><?xml version="1.0" encoding="utf-8"?>
-<p:sld xmlns:a="http://schemas.openxmlformats.org/drawingml/2006/main" xmlns:r="http://schemas.openxmlformats.org/officeDocument/2006/relationships" xmlns:p="http://schemas.openxmlformats.org/presentationml/2006/main">
-  <p:cSld>
-    <p:spTree>
-      <p:nvGrpSpPr>
-        <p:cNvPr id="1" name="">
-          <a:extLst>
-            <a:ext uri="{FF2B5EF4-FFF2-40B4-BE49-F238E27FC236}">
-              <a16:creationId xmlns:a16="http://schemas.microsoft.com/office/drawing/2014/main" id="{4B202761-AD3F-6EC1-7C22-239E83F948B1}"/>
-            </a:ext>
-          </a:extLst>
-        </p:cNvPr>
-        <p:cNvGrpSpPr/>
-        <p:nvPr/>
-      </p:nvGrpSpPr>
-      <p:grpSpPr>
-        <a:xfrm>
-          <a:off x="0" y="0"/>
-          <a:ext cx="0" cy="0"/>
-          <a:chOff x="0" y="0"/>
-          <a:chExt cx="0" cy="0"/>
-        </a:xfrm>
-      </p:grpSpPr>
-      <p:sp>
-        <p:nvSpPr>
-          <p:cNvPr id="13" name="Titel">
-            <a:extLst>
-              <a:ext uri="{FF2B5EF4-FFF2-40B4-BE49-F238E27FC236}">
-                <a16:creationId xmlns:a16="http://schemas.microsoft.com/office/drawing/2014/main" id="{E1716816-5A13-8870-3970-C4CE52F29411}"/>
-              </a:ext>
-            </a:extLst>
-          </p:cNvPr>
-          <p:cNvSpPr txBox="1">
-            <a:spLocks noGrp="1"/>
-          </p:cNvSpPr>
-          <p:nvPr>
-            <p:ph type="title"/>
-          </p:nvPr>
-        </p:nvSpPr>
-        <p:spPr>
-          <a:xfrm>
-            <a:off x="0" y="0"/>
-            <a:ext cx="9144000" cy="4659982"/>
-          </a:xfrm>
-          <a:prstGeom prst="rect">
-            <a:avLst/>
-          </a:prstGeom>
-        </p:spPr>
-        <p:txBody>
-          <a:bodyPr vert="horz" lIns="0" tIns="0" rIns="0" bIns="0" rtlCol="0" anchor="t" anchorCtr="0">
-            <a:noAutofit/>
-          </a:bodyPr>
-          <a:lstStyle>
-            <a:lvl1pPr marL="0" indent="0" algn="l" defTabSz="685800" rtl="0" eaLnBrk="1" latinLnBrk="0" hangingPunct="1">
-              <a:lnSpc>
-                <a:spcPct val="100000"/>
-              </a:lnSpc>
-              <a:spcBef>
-                <a:spcPts val="0"/>
-              </a:spcBef>
-              <a:buFont typeface="Arial" panose="020B0604020202020204" pitchFamily="34" charset="0"/>
-              <a:buNone/>
-              <a:defRPr sz="2700" b="0" kern="1200" baseline="0">
-                <a:solidFill>
-                  <a:schemeClr val="tx2"/>
-                </a:solidFill>
-                <a:latin typeface="+mn-lt"/>
-                <a:ea typeface="+mj-ea"/>
-                <a:cs typeface="+mj-cs"/>
-              </a:defRPr>
-            </a:lvl1pPr>
-          </a:lstStyle>
-          <a:p>
-            <a:pPr algn="ctr"/>
-            <a:br>
-              <a:rPr lang="en-GB" sz="4000" b="1" noProof="0" dirty="0">
-                <a:latin typeface="Arial" panose="020B0604020202020204" pitchFamily="34" charset="0"/>
-                <a:cs typeface="Arial" panose="020B0604020202020204" pitchFamily="34" charset="0"/>
-              </a:rPr>
-            </a:br>
-            <a:br>
-              <a:rPr lang="en-GB" sz="4000" b="1" noProof="0" dirty="0">
-                <a:latin typeface="Arial" panose="020B0604020202020204" pitchFamily="34" charset="0"/>
-                <a:cs typeface="Arial" panose="020B0604020202020204" pitchFamily="34" charset="0"/>
-              </a:rPr>
-            </a:br>
-            <a:br>
-              <a:rPr lang="en-GB" sz="4000" b="1" noProof="0" dirty="0">
-                <a:latin typeface="Arial" panose="020B0604020202020204" pitchFamily="34" charset="0"/>
-                <a:cs typeface="Arial" panose="020B0604020202020204" pitchFamily="34" charset="0"/>
-              </a:rPr>
-            </a:br>
-            <a:r>
-              <a:rPr lang="en-GB" sz="4000" b="1" noProof="0" dirty="0">
-                <a:latin typeface="Arial" panose="020B0604020202020204" pitchFamily="34" charset="0"/>
-                <a:cs typeface="Arial" panose="020B0604020202020204" pitchFamily="34" charset="0"/>
-              </a:rPr>
-              <a:t>Experiments</a:t>
-            </a:r>
-            <a:endParaRPr lang="en-GB" sz="4000" b="1" noProof="0" dirty="0"/>
-          </a:p>
-        </p:txBody>
-      </p:sp>
-      <p:sp>
-        <p:nvSpPr>
-          <p:cNvPr id="14" name="Foliennummer">
-            <a:extLst>
-              <a:ext uri="{FF2B5EF4-FFF2-40B4-BE49-F238E27FC236}">
-                <a16:creationId xmlns:a16="http://schemas.microsoft.com/office/drawing/2014/main" id="{C5C94A7D-15D0-D436-7DE0-AC16BB472F73}"/>
-              </a:ext>
-            </a:extLst>
-          </p:cNvPr>
-          <p:cNvSpPr>
-            <a:spLocks noGrp="1"/>
-          </p:cNvSpPr>
-          <p:nvPr>
-            <p:ph type="sldNum" sz="quarter" idx="12"/>
-          </p:nvPr>
-        </p:nvSpPr>
-        <p:spPr/>
-        <p:txBody>
-          <a:bodyPr/>
-          <a:lstStyle/>
-          <a:p>
-            <a:pPr algn="ctr"/>
-            <a:fld id="{6C8FC03C-C266-4645-ABC5-645062898383}" type="slidenum">
-              <a:rPr lang="en-GB" noProof="0" smtClean="0"/>
-              <a:pPr algn="ctr"/>
-              <a:t>9</a:t>
-            </a:fld>
-            <a:r>
-              <a:rPr lang="en-GB" noProof="0" dirty="0"/>
-              <a:t> </a:t>
-            </a:r>
-          </a:p>
-        </p:txBody>
-      </p:sp>
-    </p:spTree>
-    <p:extLst>
-      <p:ext uri="{BB962C8B-B14F-4D97-AF65-F5344CB8AC3E}">
-        <p14:creationId xmlns:p14="http://schemas.microsoft.com/office/powerpoint/2010/main" val="2888152733"/>
       </p:ext>
     </p:extLst>
   </p:cSld>
